--- a/docs/content/ggplot_2/ggplot_2_lecture.pptx
+++ b/docs/content/ggplot_2/ggplot_2_lecture.pptx
@@ -3360,7 +3360,7 @@
             </a:pPr>
             <a:r>
               <a:rPr/>
-              <a:t>2026-09-04</a:t>
+              <a:t>2026-09-08</a:t>
             </a:r>
           </a:p>
         </p:txBody>

--- a/docs/content/ggplot_2/ggplot_2_lecture.pptx
+++ b/docs/content/ggplot_2/ggplot_2_lecture.pptx
@@ -3412,7 +3412,7 @@
             </a:pPr>
             <a:r>
               <a:rPr/>
-              <a:t>→ ACTIVITY 4 Part 1 now</a:t>
+              <a:t>→ ACTIVITY 4 Parts 1–2 now</a:t>
             </a:r>
           </a:p>
         </p:txBody>
@@ -3437,7 +3437,7 @@
             </a:pPr>
             <a:r>
               <a:rPr b="1"/>
-              <a:t>🛑 Do Activity Part 1 now</a:t>
+              <a:t>🛑 Do Activity Parts 1–2 now</a:t>
             </a:r>
           </a:p>
           <a:p>
@@ -3446,13 +3446,13 @@
             </a:pPr>
             <a:r>
               <a:rPr/>
-              <a:t>Map shape and color to </a:t>
-            </a:r>
-            <a:r>
-              <a:rPr>
-                <a:latin typeface="Courier"/>
-              </a:rPr>
-              <a:t>side</a:t>
+              <a:t>Load the data, map shape and color to </a:t>
+            </a:r>
+            <a:r>
+              <a:rPr>
+                <a:latin typeface="Courier"/>
+              </a:rPr>
+              <a:t>shade</a:t>
             </a:r>
             <a:r>
               <a:rPr/>
@@ -3586,7 +3586,7 @@
             </a:pPr>
             <a:r>
               <a:rPr b="1"/>
-              <a:t>🛑 After this chunk you will do Activity Part 2.</a:t>
+              <a:t>🛑 After this chunk you will do Activity Part 3.</a:t>
             </a:r>
           </a:p>
         </p:txBody>
@@ -3684,7 +3684,7 @@
                 </a:solidFill>
                 <a:latin typeface="Courier"/>
               </a:rPr>
-              <a:t>tree_df </a:t>
+              <a:t>leaf_df </a:t>
             </a:r>
             <a:r>
               <a:rPr>
@@ -3757,7 +3757,7 @@
                 </a:solidFill>
                 <a:latin typeface="Courier"/>
               </a:rPr>
-              <a:t> width_cm, </a:t>
+              <a:t> petiole_mm, </a:t>
             </a:r>
             <a:r>
               <a:rPr>
@@ -3775,7 +3775,7 @@
                 </a:solidFill>
                 <a:latin typeface="Courier"/>
               </a:rPr>
-              <a:t> weight_g)) </a:t>
+              <a:t> mass_g)) </a:t>
             </a:r>
             <a:r>
               <a:rPr>
@@ -4147,7 +4147,7 @@
                 </a:solidFill>
                 <a:latin typeface="Courier"/>
               </a:rPr>
-              <a:t>12</a:t>
+              <a:t>50</a:t>
             </a:r>
             <a:r>
               <a:rPr>
@@ -4165,7 +4165,7 @@
                 </a:solidFill>
                 <a:latin typeface="Courier"/>
               </a:rPr>
-              <a:t>15</a:t>
+              <a:t>70</a:t>
             </a:r>
             <a:r>
               <a:rPr>
@@ -4219,7 +4219,7 @@
                 </a:solidFill>
                 <a:latin typeface="Courier"/>
               </a:rPr>
-              <a:t>2</a:t>
+              <a:t>0.4</a:t>
             </a:r>
             <a:r>
               <a:rPr>
@@ -4237,7 +4237,7 @@
                 </a:solidFill>
                 <a:latin typeface="Courier"/>
               </a:rPr>
-              <a:t>5</a:t>
+              <a:t>0.6</a:t>
             </a:r>
             <a:r>
               <a:rPr>
@@ -4366,7 +4366,7 @@
                 </a:solidFill>
                 <a:latin typeface="Courier"/>
               </a:rPr>
-              <a:t>"Width (cm)"</a:t>
+              <a:t>"Petiole Length (mm)"</a:t>
             </a:r>
             <a:r>
               <a:rPr>
@@ -4402,7 +4402,7 @@
                 </a:solidFill>
                 <a:latin typeface="Courier"/>
               </a:rPr>
-              <a:t>"Weight (g)"</a:t>
+              <a:t>"Leaf Mass (g)"</a:t>
             </a:r>
             <a:br/>
             <a:r>
@@ -4521,7 +4521,7 @@
             </a:r>
             <a:r>
               <a:rPr b="1"/>
-              <a:t>all 20 leaves</a:t>
+              <a:t>all 53 leaves</a:t>
             </a:r>
             <a:r>
               <a:rPr/>
@@ -4708,7 +4708,7 @@
                 </a:solidFill>
                 <a:latin typeface="Courier"/>
               </a:rPr>
-              <a:t>tree_df </a:t>
+              <a:t>leaf_df </a:t>
             </a:r>
             <a:r>
               <a:rPr>
@@ -4781,7 +4781,7 @@
                 </a:solidFill>
                 <a:latin typeface="Courier"/>
               </a:rPr>
-              <a:t> width_cm, </a:t>
+              <a:t> petiole_mm, </a:t>
             </a:r>
             <a:r>
               <a:rPr>
@@ -4799,7 +4799,7 @@
                 </a:solidFill>
                 <a:latin typeface="Courier"/>
               </a:rPr>
-              <a:t> weight_g)) </a:t>
+              <a:t> mass_g)) </a:t>
             </a:r>
             <a:r>
               <a:rPr>
@@ -5135,7 +5135,7 @@
                 </a:solidFill>
                 <a:latin typeface="Courier"/>
               </a:rPr>
-              <a:t>12</a:t>
+              <a:t>50</a:t>
             </a:r>
             <a:r>
               <a:rPr>
@@ -5153,7 +5153,7 @@
                 </a:solidFill>
                 <a:latin typeface="Courier"/>
               </a:rPr>
-              <a:t>15</a:t>
+              <a:t>70</a:t>
             </a:r>
             <a:r>
               <a:rPr>
@@ -5208,7 +5208,7 @@
                 </a:solidFill>
                 <a:latin typeface="Courier"/>
               </a:rPr>
-              <a:t>2</a:t>
+              <a:t>0.4</a:t>
             </a:r>
             <a:r>
               <a:rPr>
@@ -5226,7 +5226,7 @@
                 </a:solidFill>
                 <a:latin typeface="Courier"/>
               </a:rPr>
-              <a:t>5</a:t>
+              <a:t>0.6</a:t>
             </a:r>
             <a:r>
               <a:rPr>
@@ -5355,7 +5355,7 @@
                 </a:solidFill>
                 <a:latin typeface="Courier"/>
               </a:rPr>
-              <a:t>"Width (cm)"</a:t>
+              <a:t>"Petiole Length (mm)"</a:t>
             </a:r>
             <a:r>
               <a:rPr>
@@ -5391,7 +5391,7 @@
                 </a:solidFill>
                 <a:latin typeface="Courier"/>
               </a:rPr>
-              <a:t>"Weight (g)"</a:t>
+              <a:t>"Leaf Mass (g)"</a:t>
             </a:r>
             <a:br/>
             <a:r>
@@ -5648,7 +5648,7 @@
             </a:pPr>
             <a:r>
               <a:rPr/>
-              <a:t>→ ACTIVITY 4 Part 2 now</a:t>
+              <a:t>→ ACTIVITY 4 Part 3 now</a:t>
             </a:r>
           </a:p>
         </p:txBody>
@@ -5673,7 +5673,7 @@
             </a:pPr>
             <a:r>
               <a:rPr b="1"/>
-              <a:t>🛑 Do Activity Part 2 now</a:t>
+              <a:t>🛑 Do Activity Part 3 now</a:t>
             </a:r>
           </a:p>
           <a:p>
@@ -5792,7 +5792,7 @@
             </a:pPr>
             <a:r>
               <a:rPr b="1"/>
-              <a:t>🛑 After this chunk you will do Activity Parts 3–4.</a:t>
+              <a:t>🛑 After this chunk you will do Activity Parts 4–5.</a:t>
             </a:r>
           </a:p>
         </p:txBody>
@@ -5884,7 +5884,7 @@
                 </a:solidFill>
                 <a:latin typeface="Courier"/>
               </a:rPr>
-              <a:t>tree_df </a:t>
+              <a:t>leaf_df </a:t>
             </a:r>
             <a:r>
               <a:rPr>
@@ -5957,7 +5957,7 @@
                 </a:solidFill>
                 <a:latin typeface="Courier"/>
               </a:rPr>
-              <a:t> side, </a:t>
+              <a:t> shade, </a:t>
             </a:r>
             <a:r>
               <a:rPr>
@@ -5975,7 +5975,7 @@
                 </a:solidFill>
                 <a:latin typeface="Courier"/>
               </a:rPr>
-              <a:t> weight_g, </a:t>
+              <a:t> mass_g, </a:t>
             </a:r>
             <a:r>
               <a:rPr>
@@ -5993,7 +5993,7 @@
                 </a:solidFill>
                 <a:latin typeface="Courier"/>
               </a:rPr>
-              <a:t> side)) </a:t>
+              <a:t> shade)) </a:t>
             </a:r>
             <a:r>
               <a:rPr>
@@ -6311,7 +6311,7 @@
                 </a:solidFill>
                 <a:latin typeface="Courier"/>
               </a:rPr>
-              <a:t>"Side of Tree"</a:t>
+              <a:t>"Shade"</a:t>
             </a:r>
             <a:r>
               <a:rPr>
@@ -6347,7 +6347,7 @@
                 </a:solidFill>
                 <a:latin typeface="Courier"/>
               </a:rPr>
-              <a:t>"Leaf Weight (g)"</a:t>
+              <a:t>"Leaf Mass (g)"</a:t>
             </a:r>
             <a:r>
               <a:rPr>
@@ -6383,7 +6383,7 @@
                 </a:solidFill>
                 <a:latin typeface="Courier"/>
               </a:rPr>
-              <a:t>"Leaf Weight by Side"</a:t>
+              <a:t>"Leaf Mass by Shade"</a:t>
             </a:r>
             <a:r>
               <a:rPr>
@@ -6927,7 +6927,7 @@
                 </a:solidFill>
                 <a:latin typeface="Courier"/>
               </a:rPr>
-              <a:t>tree_df </a:t>
+              <a:t>leaf_df </a:t>
             </a:r>
             <a:r>
               <a:rPr>
@@ -7000,7 +7000,7 @@
                 </a:solidFill>
                 <a:latin typeface="Courier"/>
               </a:rPr>
-              <a:t> side, </a:t>
+              <a:t> shade, </a:t>
             </a:r>
             <a:r>
               <a:rPr>
@@ -7018,7 +7018,7 @@
                 </a:solidFill>
                 <a:latin typeface="Courier"/>
               </a:rPr>
-              <a:t> weight_g, </a:t>
+              <a:t> mass_g, </a:t>
             </a:r>
             <a:r>
               <a:rPr>
@@ -7036,7 +7036,7 @@
                 </a:solidFill>
                 <a:latin typeface="Courier"/>
               </a:rPr>
-              <a:t> side)) </a:t>
+              <a:t> shade)) </a:t>
             </a:r>
             <a:r>
               <a:rPr>
@@ -7354,7 +7354,7 @@
                 </a:solidFill>
                 <a:latin typeface="Courier"/>
               </a:rPr>
-              <a:t>"Side of Tree"</a:t>
+              <a:t>"Shade"</a:t>
             </a:r>
             <a:r>
               <a:rPr>
@@ -7390,7 +7390,7 @@
                 </a:solidFill>
                 <a:latin typeface="Courier"/>
               </a:rPr>
-              <a:t>"Leaf Weight (g)"</a:t>
+              <a:t>"Leaf Mass (g)"</a:t>
             </a:r>
             <a:r>
               <a:rPr>
@@ -7426,7 +7426,7 @@
                 </a:solidFill>
                 <a:latin typeface="Courier"/>
               </a:rPr>
-              <a:t>"Leaf Weight by Side"</a:t>
+              <a:t>"Leaf Mass by Shade"</a:t>
             </a:r>
             <a:r>
               <a:rPr>
@@ -7958,7 +7958,7 @@
                 </a:solidFill>
                 <a:latin typeface="Courier"/>
               </a:rPr>
-              <a:t>leaf_plot &lt;- tree_df </a:t>
+              <a:t>leaf_plot &lt;- leaf_df </a:t>
             </a:r>
             <a:r>
               <a:rPr>
@@ -8031,7 +8031,7 @@
                 </a:solidFill>
                 <a:latin typeface="Courier"/>
               </a:rPr>
-              <a:t> side, </a:t>
+              <a:t> shade, </a:t>
             </a:r>
             <a:r>
               <a:rPr>
@@ -8049,7 +8049,7 @@
                 </a:solidFill>
                 <a:latin typeface="Courier"/>
               </a:rPr>
-              <a:t> weight_g, </a:t>
+              <a:t> mass_g, </a:t>
             </a:r>
             <a:r>
               <a:rPr>
@@ -8067,7 +8067,7 @@
                 </a:solidFill>
                 <a:latin typeface="Courier"/>
               </a:rPr>
-              <a:t> side)) </a:t>
+              <a:t> shade)) </a:t>
             </a:r>
             <a:r>
               <a:rPr>
@@ -8385,7 +8385,7 @@
                 </a:solidFill>
                 <a:latin typeface="Courier"/>
               </a:rPr>
-              <a:t>"Side of Tree"</a:t>
+              <a:t>"Shade"</a:t>
             </a:r>
             <a:r>
               <a:rPr>
@@ -8421,7 +8421,7 @@
                 </a:solidFill>
                 <a:latin typeface="Courier"/>
               </a:rPr>
-              <a:t>"Leaf Weight (g)"</a:t>
+              <a:t>"Leaf Mass (g)"</a:t>
             </a:r>
             <a:r>
               <a:rPr>
@@ -8579,7 +8579,7 @@
                 </a:solidFill>
                 <a:latin typeface="Courier"/>
               </a:rPr>
-              <a:t>"figures/leaf_weight_theme.png"</a:t>
+              <a:t>"figures/leaf_mass_theme.png"</a:t>
             </a:r>
             <a:r>
               <a:rPr>
@@ -8809,7 +8809,7 @@
                 </a:solidFill>
                 <a:latin typeface="Courier"/>
               </a:rPr>
-              <a:t>"figures/leaf_weight_theme.pdf"</a:t>
+              <a:t>"figures/leaf_mass_theme.pdf"</a:t>
             </a:r>
             <a:r>
               <a:rPr>
@@ -9261,7 +9261,7 @@
               <a:rPr>
                 <a:latin typeface="Courier"/>
               </a:rPr>
-              <a:t>tree_df %&gt;% ggplot(...)</a:t>
+              <a:t>leaf_df %&gt;% ggplot(...)</a:t>
             </a:r>
           </a:p>
           <a:p>
@@ -9399,7 +9399,7 @@
             </a:pPr>
             <a:r>
               <a:rPr/>
-              <a:t>→ ACTIVITY 4 Parts 3–4 now</a:t>
+              <a:t>→ ACTIVITY 4 Parts 4–5 now</a:t>
             </a:r>
           </a:p>
         </p:txBody>
@@ -9424,7 +9424,7 @@
             </a:pPr>
             <a:r>
               <a:rPr b="1"/>
-              <a:t>🛑 Go to Activity 4 — Parts 3–4</a:t>
+              <a:t>🛑 Go to Activity 4 — Parts 4–5</a:t>
             </a:r>
           </a:p>
           <a:p>
@@ -10091,7 +10091,7 @@
             </a:r>
             <a:r>
               <a:rPr/>
-              <a:t>. After each chunk you switch to the activity worksheet and type the code yourself.</a:t>
+              <a:t>. After each chunk you switch to the activity and type the code yourself into your R script.</a:t>
             </a:r>
           </a:p>
         </p:txBody>
@@ -10348,7 +10348,7 @@
                 </a:solidFill>
                 <a:latin typeface="Courier"/>
               </a:rPr>
-              <a:t>tree_df &lt;- </a:t>
+              <a:t>leaf_df &lt;- </a:t>
             </a:r>
             <a:r>
               <a:rPr>
@@ -10375,7 +10375,7 @@
                 </a:solidFill>
                 <a:latin typeface="Courier"/>
               </a:rPr>
-              <a:t>"data/2026_06_25_tree_experiment_raw_data.xlsx"</a:t>
+              <a:t>"data/2026_09_03_data_sci_leaf_area.xlsx"</a:t>
             </a:r>
             <a:r>
               <a:rPr>
@@ -10521,7 +10521,7 @@
             </a:pPr>
             <a:r>
               <a:rPr b="1"/>
-              <a:t>🛑 After this chunk you will do Activity Part 1.</a:t>
+              <a:t>🛑 After this chunk you will do Activity Parts 1–2.</a:t>
             </a:r>
           </a:p>
         </p:txBody>
@@ -10617,7 +10617,7 @@
               <a:rPr sz="2000">
                 <a:latin typeface="Courier"/>
               </a:rPr>
-              <a:t>color = side</a:t>
+              <a:t>color = shade</a:t>
             </a:r>
             <a:r>
               <a:rPr sz="2000"/>
@@ -10627,7 +10627,7 @@
               <a:rPr sz="2000">
                 <a:latin typeface="Courier"/>
               </a:rPr>
-              <a:t>shape = side</a:t>
+              <a:t>shape = shade</a:t>
             </a:r>
             <a:r>
               <a:rPr sz="2000"/>
@@ -10701,7 +10701,7 @@
                 </a:solidFill>
                 <a:latin typeface="Courier"/>
               </a:rPr>
-              <a:t>tree_df </a:t>
+              <a:t>leaf_df </a:t>
             </a:r>
             <a:r>
               <a:rPr>
@@ -10774,7 +10774,7 @@
                 </a:solidFill>
                 <a:latin typeface="Courier"/>
               </a:rPr>
-              <a:t> width_cm, </a:t>
+              <a:t> petiole_mm, </a:t>
             </a:r>
             <a:r>
               <a:rPr>
@@ -10792,7 +10792,7 @@
                 </a:solidFill>
                 <a:latin typeface="Courier"/>
               </a:rPr>
-              <a:t> weight_g, </a:t>
+              <a:t> mass_g, </a:t>
             </a:r>
             <a:r>
               <a:rPr>
@@ -10810,7 +10810,7 @@
                 </a:solidFill>
                 <a:latin typeface="Courier"/>
               </a:rPr>
-              <a:t> side, </a:t>
+              <a:t> shade, </a:t>
             </a:r>
             <a:r>
               <a:rPr>
@@ -10828,7 +10828,7 @@
                 </a:solidFill>
                 <a:latin typeface="Courier"/>
               </a:rPr>
-              <a:t> side)) </a:t>
+              <a:t> shade)) </a:t>
             </a:r>
             <a:r>
               <a:rPr>
@@ -11156,7 +11156,7 @@
                 </a:solidFill>
                 <a:latin typeface="Courier"/>
               </a:rPr>
-              <a:t>"Leaf Weight vs. Width"</a:t>
+              <a:t>"Leaf Mass vs. Petiole Length"</a:t>
             </a:r>
             <a:r>
               <a:rPr>
@@ -11202,7 +11202,7 @@
                 </a:solidFill>
                 <a:latin typeface="Courier"/>
               </a:rPr>
-              <a:t>"Width (cm)"</a:t>
+              <a:t>"Petiole Length (mm)"</a:t>
             </a:r>
             <a:r>
               <a:rPr>
@@ -11238,7 +11238,7 @@
                 </a:solidFill>
                 <a:latin typeface="Courier"/>
               </a:rPr>
-              <a:t>"Weight (g)"</a:t>
+              <a:t>"Leaf Mass (g)"</a:t>
             </a:r>
             <a:r>
               <a:rPr>
@@ -11284,7 +11284,7 @@
                 </a:solidFill>
                 <a:latin typeface="Courier"/>
               </a:rPr>
-              <a:t>"Side"</a:t>
+              <a:t>"Shade"</a:t>
             </a:r>
             <a:r>
               <a:rPr>
@@ -11320,7 +11320,7 @@
                 </a:solidFill>
                 <a:latin typeface="Courier"/>
               </a:rPr>
-              <a:t>"Side"</a:t>
+              <a:t>"Shade"</a:t>
             </a:r>
             <a:br/>
             <a:r>
@@ -11617,7 +11617,7 @@
                 </a:solidFill>
                 <a:latin typeface="Courier"/>
               </a:rPr>
-              <a:t>tree_df </a:t>
+              <a:t>leaf_df </a:t>
             </a:r>
             <a:r>
               <a:rPr>
@@ -11690,7 +11690,7 @@
                 </a:solidFill>
                 <a:latin typeface="Courier"/>
               </a:rPr>
-              <a:t> width_cm, </a:t>
+              <a:t> petiole_mm, </a:t>
             </a:r>
             <a:r>
               <a:rPr>
@@ -11708,7 +11708,7 @@
                 </a:solidFill>
                 <a:latin typeface="Courier"/>
               </a:rPr>
-              <a:t> weight_g)) </a:t>
+              <a:t> mass_g)) </a:t>
             </a:r>
             <a:r>
               <a:rPr>
@@ -12072,7 +12072,7 @@
                 </a:solidFill>
                 <a:latin typeface="Courier"/>
               </a:rPr>
-              <a:t>"Leaf Weight vs. Width, with Trend Line"</a:t>
+              <a:t>"Leaf Mass vs. Petiole Length, with Trend Line"</a:t>
             </a:r>
             <a:r>
               <a:rPr>
@@ -12118,7 +12118,7 @@
                 </a:solidFill>
                 <a:latin typeface="Courier"/>
               </a:rPr>
-              <a:t>"Width (cm)"</a:t>
+              <a:t>"Petiole Length (mm)"</a:t>
             </a:r>
             <a:r>
               <a:rPr>
@@ -12154,7 +12154,7 @@
                 </a:solidFill>
                 <a:latin typeface="Courier"/>
               </a:rPr>
-              <a:t>"Weight (g)"</a:t>
+              <a:t>"Leaf Mass (g)"</a:t>
             </a:r>
             <a:br/>
             <a:r>

--- a/docs/content/ggplot_2/ggplot_2_lecture.pptx
+++ b/docs/content/ggplot_2/ggplot_2_lecture.pptx
@@ -3360,7 +3360,7 @@
             </a:pPr>
             <a:r>
               <a:rPr/>
-              <a:t>2026-09-08</a:t>
+              <a:t>2026-09-10</a:t>
             </a:r>
           </a:p>
         </p:txBody>

--- a/docs/content/ggplot_2/ggplot_2_lecture.pptx
+++ b/docs/content/ggplot_2/ggplot_2_lecture.pptx
@@ -3360,7 +3360,7 @@
             </a:pPr>
             <a:r>
               <a:rPr/>
-              <a:t>2026-09-10</a:t>
+              <a:t>2026-09-14</a:t>
             </a:r>
           </a:p>
         </p:txBody>
@@ -3518,7 +3518,7 @@
             </a:pPr>
             <a:r>
               <a:rPr/>
-              <a:t>🧩 Chunk 2 of 3 · Zooming Without Losing Data</a:t>
+              <a:t>🧩 Chunk 2 of 3 · Zooming In Safely</a:t>
             </a:r>
           </a:p>
         </p:txBody>
@@ -3557,7 +3557,7 @@
             </a:r>
             <a:r>
               <a:rPr/>
-              <a:t> vs. </a:t>
+              <a:t> to zoom — and the </a:t>
             </a:r>
             <a:r>
               <a:rPr>
@@ -3577,7 +3577,7 @@
             </a:r>
             <a:r>
               <a:rPr/>
-              <a:t> — they look the same until they don’t.</a:t>
+              <a:t> trap to avoid.</a:t>
             </a:r>
           </a:p>
           <a:p>
@@ -3644,7 +3644,7 @@
             </a:r>
             <a:r>
               <a:rPr/>
-              <a:t> — Zoom Without Removing Data</a:t>
+              <a:t> — Zoom the View, Keep the Data</a:t>
             </a:r>
           </a:p>
         </p:txBody>
@@ -3993,16 +3993,172 @@
                 </a:solidFill>
                 <a:latin typeface="Courier"/>
               </a:rPr>
+              <a:t>) </a:t>
+            </a:r>
+            <a:r>
+              <a:rPr>
+                <a:solidFill>
+                  <a:srgbClr val="5E5E5E"/>
+                </a:solidFill>
+                <a:latin typeface="Courier"/>
+              </a:rPr>
+              <a:t>+</a:t>
+            </a:r>
+            <a:br/>
+            <a:r>
+              <a:rPr>
+                <a:solidFill>
+                  <a:srgbClr val="003B4F"/>
+                </a:solidFill>
+                <a:latin typeface="Courier"/>
+              </a:rPr>
+              <a:t>  </a:t>
+            </a:r>
+            <a:r>
+              <a:rPr>
+                <a:solidFill>
+                  <a:srgbClr val="4758AB"/>
+                </a:solidFill>
+                <a:latin typeface="Courier"/>
+              </a:rPr>
+              <a:t>coord_cartesian</a:t>
+            </a:r>
+            <a:r>
+              <a:rPr>
+                <a:solidFill>
+                  <a:srgbClr val="003B4F"/>
+                </a:solidFill>
+                <a:latin typeface="Courier"/>
+              </a:rPr>
+              <a:t>(</a:t>
+            </a:r>
+            <a:r>
+              <a:rPr>
+                <a:solidFill>
+                  <a:srgbClr val="657422"/>
+                </a:solidFill>
+                <a:latin typeface="Courier"/>
+              </a:rPr>
+              <a:t>xlim =</a:t>
+            </a:r>
+            <a:r>
+              <a:rPr>
+                <a:solidFill>
+                  <a:srgbClr val="003B4F"/>
+                </a:solidFill>
+                <a:latin typeface="Courier"/>
+              </a:rPr>
+              <a:t> </a:t>
+            </a:r>
+            <a:r>
+              <a:rPr>
+                <a:solidFill>
+                  <a:srgbClr val="4758AB"/>
+                </a:solidFill>
+                <a:latin typeface="Courier"/>
+              </a:rPr>
+              <a:t>c</a:t>
+            </a:r>
+            <a:r>
+              <a:rPr>
+                <a:solidFill>
+                  <a:srgbClr val="003B4F"/>
+                </a:solidFill>
+                <a:latin typeface="Courier"/>
+              </a:rPr>
+              <a:t>(</a:t>
+            </a:r>
+            <a:r>
+              <a:rPr>
+                <a:solidFill>
+                  <a:srgbClr val="AD0000"/>
+                </a:solidFill>
+                <a:latin typeface="Courier"/>
+              </a:rPr>
+              <a:t>50</a:t>
+            </a:r>
+            <a:r>
+              <a:rPr>
+                <a:solidFill>
+                  <a:srgbClr val="003B4F"/>
+                </a:solidFill>
+                <a:latin typeface="Courier"/>
+              </a:rPr>
               <a:t>, </a:t>
             </a:r>
             <a:r>
               <a:rPr>
                 <a:solidFill>
+                  <a:srgbClr val="AD0000"/>
+                </a:solidFill>
+                <a:latin typeface="Courier"/>
+              </a:rPr>
+              <a:t>70</a:t>
+            </a:r>
+            <a:r>
+              <a:rPr>
+                <a:solidFill>
+                  <a:srgbClr val="003B4F"/>
+                </a:solidFill>
+                <a:latin typeface="Courier"/>
+              </a:rPr>
+              <a:t>)) </a:t>
+            </a:r>
+            <a:r>
+              <a:rPr>
+                <a:solidFill>
+                  <a:srgbClr val="5E5E5E"/>
+                </a:solidFill>
+                <a:latin typeface="Courier"/>
+              </a:rPr>
+              <a:t>+</a:t>
+            </a:r>
+            <a:br/>
+            <a:r>
+              <a:rPr>
+                <a:solidFill>
+                  <a:srgbClr val="003B4F"/>
+                </a:solidFill>
+                <a:latin typeface="Courier"/>
+              </a:rPr>
+              <a:t>  </a:t>
+            </a:r>
+            <a:r>
+              <a:rPr>
+                <a:solidFill>
+                  <a:srgbClr val="4758AB"/>
+                </a:solidFill>
+                <a:latin typeface="Courier"/>
+              </a:rPr>
+              <a:t>labs</a:t>
+            </a:r>
+            <a:r>
+              <a:rPr>
+                <a:solidFill>
+                  <a:srgbClr val="003B4F"/>
+                </a:solidFill>
+                <a:latin typeface="Courier"/>
+              </a:rPr>
+              <a:t>(</a:t>
+            </a:r>
+            <a:br/>
+            <a:r>
+              <a:rPr>
+                <a:solidFill>
+                  <a:srgbClr val="003B4F"/>
+                </a:solidFill>
+                <a:latin typeface="Courier"/>
+              </a:rPr>
+              <a:t>    </a:t>
+            </a:r>
+            <a:r>
+              <a:rPr>
+                <a:solidFill>
                   <a:srgbClr val="657422"/>
                 </a:solidFill>
                 <a:latin typeface="Courier"/>
               </a:rPr>
-              <a:t>fill =</a:t>
+              <a:t>title =</a:t>
             </a:r>
             <a:r>
               <a:rPr>
@@ -4020,16 +4176,26 @@
                 </a:solidFill>
                 <a:latin typeface="Courier"/>
               </a:rPr>
-              <a:t>"tomato"</a:t>
-            </a:r>
-            <a:r>
-              <a:rPr>
-                <a:solidFill>
-                  <a:srgbClr val="003B4F"/>
-                </a:solidFill>
-                <a:latin typeface="Courier"/>
-              </a:rPr>
-              <a:t>, </a:t>
+              <a:t>"Zoomed with coord_cartesian()"</a:t>
+            </a:r>
+            <a:r>
+              <a:rPr>
+                <a:solidFill>
+                  <a:srgbClr val="003B4F"/>
+                </a:solidFill>
+                <a:latin typeface="Courier"/>
+              </a:rPr>
+              <a:t>,</a:t>
+            </a:r>
+            <a:br/>
+            <a:r>
+              <a:rPr>
+                <a:solidFill>
+                  <a:srgbClr val="003B4F"/>
+                </a:solidFill>
+                <a:latin typeface="Courier"/>
+              </a:rPr>
+              <a:t>    </a:t>
             </a:r>
             <a:r>
               <a:rPr>
@@ -4038,7 +4204,7 @@
                 </a:solidFill>
                 <a:latin typeface="Courier"/>
               </a:rPr>
-              <a:t>alpha =</a:t>
+              <a:t>x =</a:t>
             </a:r>
             <a:r>
               <a:rPr>
@@ -4052,29 +4218,20 @@
             <a:r>
               <a:rPr>
                 <a:solidFill>
-                  <a:srgbClr val="AD0000"/>
-                </a:solidFill>
-                <a:latin typeface="Courier"/>
-              </a:rPr>
-              <a:t>0.15</a:t>
-            </a:r>
-            <a:r>
-              <a:rPr>
-                <a:solidFill>
-                  <a:srgbClr val="003B4F"/>
-                </a:solidFill>
-                <a:latin typeface="Courier"/>
-              </a:rPr>
-              <a:t>) </a:t>
-            </a:r>
-            <a:r>
-              <a:rPr>
-                <a:solidFill>
-                  <a:srgbClr val="5E5E5E"/>
-                </a:solidFill>
-                <a:latin typeface="Courier"/>
-              </a:rPr>
-              <a:t>+</a:t>
+                  <a:srgbClr val="20794D"/>
+                </a:solidFill>
+                <a:latin typeface="Courier"/>
+              </a:rPr>
+              <a:t>"Petiole Length (mm)"</a:t>
+            </a:r>
+            <a:r>
+              <a:rPr>
+                <a:solidFill>
+                  <a:srgbClr val="003B4F"/>
+                </a:solidFill>
+                <a:latin typeface="Courier"/>
+              </a:rPr>
+              <a:t>,</a:t>
             </a:r>
             <a:br/>
             <a:r>
@@ -4084,298 +4241,7 @@
                 </a:solidFill>
                 <a:latin typeface="Courier"/>
               </a:rPr>
-              <a:t>  </a:t>
-            </a:r>
-            <a:r>
-              <a:rPr>
-                <a:solidFill>
-                  <a:srgbClr val="4758AB"/>
-                </a:solidFill>
-                <a:latin typeface="Courier"/>
-              </a:rPr>
-              <a:t>coord_cartesian</a:t>
-            </a:r>
-            <a:r>
-              <a:rPr>
-                <a:solidFill>
-                  <a:srgbClr val="003B4F"/>
-                </a:solidFill>
-                <a:latin typeface="Courier"/>
-              </a:rPr>
-              <a:t>(</a:t>
-            </a:r>
-            <a:r>
-              <a:rPr>
-                <a:solidFill>
-                  <a:srgbClr val="657422"/>
-                </a:solidFill>
-                <a:latin typeface="Courier"/>
-              </a:rPr>
-              <a:t>xlim =</a:t>
-            </a:r>
-            <a:r>
-              <a:rPr>
-                <a:solidFill>
-                  <a:srgbClr val="003B4F"/>
-                </a:solidFill>
-                <a:latin typeface="Courier"/>
-              </a:rPr>
-              <a:t> </a:t>
-            </a:r>
-            <a:r>
-              <a:rPr>
-                <a:solidFill>
-                  <a:srgbClr val="4758AB"/>
-                </a:solidFill>
-                <a:latin typeface="Courier"/>
-              </a:rPr>
-              <a:t>c</a:t>
-            </a:r>
-            <a:r>
-              <a:rPr>
-                <a:solidFill>
-                  <a:srgbClr val="003B4F"/>
-                </a:solidFill>
-                <a:latin typeface="Courier"/>
-              </a:rPr>
-              <a:t>(</a:t>
-            </a:r>
-            <a:r>
-              <a:rPr>
-                <a:solidFill>
-                  <a:srgbClr val="AD0000"/>
-                </a:solidFill>
-                <a:latin typeface="Courier"/>
-              </a:rPr>
-              <a:t>50</a:t>
-            </a:r>
-            <a:r>
-              <a:rPr>
-                <a:solidFill>
-                  <a:srgbClr val="003B4F"/>
-                </a:solidFill>
-                <a:latin typeface="Courier"/>
-              </a:rPr>
-              <a:t>, </a:t>
-            </a:r>
-            <a:r>
-              <a:rPr>
-                <a:solidFill>
-                  <a:srgbClr val="AD0000"/>
-                </a:solidFill>
-                <a:latin typeface="Courier"/>
-              </a:rPr>
-              <a:t>70</a:t>
-            </a:r>
-            <a:r>
-              <a:rPr>
-                <a:solidFill>
-                  <a:srgbClr val="003B4F"/>
-                </a:solidFill>
-                <a:latin typeface="Courier"/>
-              </a:rPr>
-              <a:t>), </a:t>
-            </a:r>
-            <a:r>
-              <a:rPr>
-                <a:solidFill>
-                  <a:srgbClr val="657422"/>
-                </a:solidFill>
-                <a:latin typeface="Courier"/>
-              </a:rPr>
-              <a:t>ylim =</a:t>
-            </a:r>
-            <a:r>
-              <a:rPr>
-                <a:solidFill>
-                  <a:srgbClr val="003B4F"/>
-                </a:solidFill>
-                <a:latin typeface="Courier"/>
-              </a:rPr>
-              <a:t> </a:t>
-            </a:r>
-            <a:r>
-              <a:rPr>
-                <a:solidFill>
-                  <a:srgbClr val="4758AB"/>
-                </a:solidFill>
-                <a:latin typeface="Courier"/>
-              </a:rPr>
-              <a:t>c</a:t>
-            </a:r>
-            <a:r>
-              <a:rPr>
-                <a:solidFill>
-                  <a:srgbClr val="003B4F"/>
-                </a:solidFill>
-                <a:latin typeface="Courier"/>
-              </a:rPr>
-              <a:t>(</a:t>
-            </a:r>
-            <a:r>
-              <a:rPr>
-                <a:solidFill>
-                  <a:srgbClr val="AD0000"/>
-                </a:solidFill>
-                <a:latin typeface="Courier"/>
-              </a:rPr>
-              <a:t>0.4</a:t>
-            </a:r>
-            <a:r>
-              <a:rPr>
-                <a:solidFill>
-                  <a:srgbClr val="003B4F"/>
-                </a:solidFill>
-                <a:latin typeface="Courier"/>
-              </a:rPr>
-              <a:t>, </a:t>
-            </a:r>
-            <a:r>
-              <a:rPr>
-                <a:solidFill>
-                  <a:srgbClr val="AD0000"/>
-                </a:solidFill>
-                <a:latin typeface="Courier"/>
-              </a:rPr>
-              <a:t>0.6</a:t>
-            </a:r>
-            <a:r>
-              <a:rPr>
-                <a:solidFill>
-                  <a:srgbClr val="003B4F"/>
-                </a:solidFill>
-                <a:latin typeface="Courier"/>
-              </a:rPr>
-              <a:t>)) </a:t>
-            </a:r>
-            <a:r>
-              <a:rPr>
-                <a:solidFill>
-                  <a:srgbClr val="5E5E5E"/>
-                </a:solidFill>
-                <a:latin typeface="Courier"/>
-              </a:rPr>
-              <a:t>+</a:t>
-            </a:r>
-            <a:br/>
-            <a:r>
-              <a:rPr>
-                <a:solidFill>
-                  <a:srgbClr val="003B4F"/>
-                </a:solidFill>
-                <a:latin typeface="Courier"/>
-              </a:rPr>
-              <a:t>  </a:t>
-            </a:r>
-            <a:r>
-              <a:rPr>
-                <a:solidFill>
-                  <a:srgbClr val="4758AB"/>
-                </a:solidFill>
-                <a:latin typeface="Courier"/>
-              </a:rPr>
-              <a:t>labs</a:t>
-            </a:r>
-            <a:r>
-              <a:rPr>
-                <a:solidFill>
-                  <a:srgbClr val="003B4F"/>
-                </a:solidFill>
-                <a:latin typeface="Courier"/>
-              </a:rPr>
-              <a:t>(</a:t>
-            </a:r>
-            <a:br/>
-            <a:r>
-              <a:rPr>
-                <a:solidFill>
-                  <a:srgbClr val="003B4F"/>
-                </a:solidFill>
-                <a:latin typeface="Courier"/>
-              </a:rPr>
               <a:t>    </a:t>
-            </a:r>
-            <a:r>
-              <a:rPr>
-                <a:solidFill>
-                  <a:srgbClr val="657422"/>
-                </a:solidFill>
-                <a:latin typeface="Courier"/>
-              </a:rPr>
-              <a:t>title =</a:t>
-            </a:r>
-            <a:r>
-              <a:rPr>
-                <a:solidFill>
-                  <a:srgbClr val="003B4F"/>
-                </a:solidFill>
-                <a:latin typeface="Courier"/>
-              </a:rPr>
-              <a:t> </a:t>
-            </a:r>
-            <a:r>
-              <a:rPr>
-                <a:solidFill>
-                  <a:srgbClr val="20794D"/>
-                </a:solidFill>
-                <a:latin typeface="Courier"/>
-              </a:rPr>
-              <a:t>"Zoomed with coord_cartesian()"</a:t>
-            </a:r>
-            <a:r>
-              <a:rPr>
-                <a:solidFill>
-                  <a:srgbClr val="003B4F"/>
-                </a:solidFill>
-                <a:latin typeface="Courier"/>
-              </a:rPr>
-              <a:t>,</a:t>
-            </a:r>
-            <a:br/>
-            <a:r>
-              <a:rPr>
-                <a:solidFill>
-                  <a:srgbClr val="003B4F"/>
-                </a:solidFill>
-                <a:latin typeface="Courier"/>
-              </a:rPr>
-              <a:t>    </a:t>
-            </a:r>
-            <a:r>
-              <a:rPr>
-                <a:solidFill>
-                  <a:srgbClr val="657422"/>
-                </a:solidFill>
-                <a:latin typeface="Courier"/>
-              </a:rPr>
-              <a:t>x =</a:t>
-            </a:r>
-            <a:r>
-              <a:rPr>
-                <a:solidFill>
-                  <a:srgbClr val="003B4F"/>
-                </a:solidFill>
-                <a:latin typeface="Courier"/>
-              </a:rPr>
-              <a:t> </a:t>
-            </a:r>
-            <a:r>
-              <a:rPr>
-                <a:solidFill>
-                  <a:srgbClr val="20794D"/>
-                </a:solidFill>
-                <a:latin typeface="Courier"/>
-              </a:rPr>
-              <a:t>"Petiole Length (mm)"</a:t>
-            </a:r>
-            <a:r>
-              <a:rPr>
-                <a:solidFill>
-                  <a:srgbClr val="003B4F"/>
-                </a:solidFill>
-                <a:latin typeface="Courier"/>
-              </a:rPr>
-              <a:t>, </a:t>
             </a:r>
             <a:r>
               <a:rPr>
@@ -4517,7 +4383,7 @@
             <a:pPr lvl="0"/>
             <a:r>
               <a:rPr/>
-              <a:t>The trend line is fit on </a:t>
+              <a:t>The line is fit on </a:t>
             </a:r>
             <a:r>
               <a:rPr b="1"/>
@@ -4525,14 +4391,14 @@
             </a:r>
             <a:r>
               <a:rPr/>
-              <a:t>, then the plot window is cropped afterward</a:t>
+              <a:t>, then the window is cropped afterward</a:t>
             </a:r>
           </a:p>
           <a:p>
             <a:pPr lvl="0"/>
             <a:r>
               <a:rPr/>
-              <a:t>Safe to use anytime you just want a closer look</a:t>
+              <a:t>This is the one to reach for whenever you just want a closer look</a:t>
             </a:r>
           </a:p>
         </p:txBody>
@@ -4583,6 +4449,10 @@
               <a:buNone/>
             </a:pPr>
             <a:r>
+              <a:rPr/>
+              <a:t>The Trap — </a:t>
+            </a:r>
+            <a:r>
               <a:rPr>
                 <a:latin typeface="Courier"/>
               </a:rPr>
@@ -4600,7 +4470,7 @@
             </a:r>
             <a:r>
               <a:rPr/>
-              <a:t> — Removes Data First</a:t>
+              <a:t> Delete Rows First</a:t>
             </a:r>
           </a:p>
         </p:txBody>
@@ -4638,7 +4508,7 @@
             </a:r>
             <a:r>
               <a:rPr sz="2000"/>
-              <a:t> If we drop the leaves outside our zoom window </a:t>
+              <a:t> If we drop the leaves outside the window </a:t>
             </a:r>
             <a:r>
               <a:rPr sz="2000" i="1"/>
@@ -4646,7 +4516,7 @@
             </a:r>
             <a:r>
               <a:rPr sz="2000"/>
-              <a:t> fitting the trend line, will the line look the same as before, or different?</a:t>
+              <a:t> fitting the trend line, will the line look the same, or different?</a:t>
             </a:r>
           </a:p>
         </p:txBody>
@@ -4698,7 +4568,7 @@
                 </a:solidFill>
                 <a:latin typeface="Courier"/>
               </a:rPr>
-              <a:t># xlim()/ylim() DELETE rows outside the range first ----</a:t>
+              <a:t># xlim() DELETES rows outside the range first ----------</a:t>
             </a:r>
             <a:br/>
             <a:r>
@@ -5017,16 +4887,136 @@
                 </a:solidFill>
                 <a:latin typeface="Courier"/>
               </a:rPr>
+              <a:t>) </a:t>
+            </a:r>
+            <a:r>
+              <a:rPr>
+                <a:solidFill>
+                  <a:srgbClr val="5E5E5E"/>
+                </a:solidFill>
+                <a:latin typeface="Courier"/>
+              </a:rPr>
+              <a:t>+</a:t>
+            </a:r>
+            <a:br/>
+            <a:r>
+              <a:rPr>
+                <a:solidFill>
+                  <a:srgbClr val="003B4F"/>
+                </a:solidFill>
+                <a:latin typeface="Courier"/>
+              </a:rPr>
+              <a:t>  </a:t>
+            </a:r>
+            <a:r>
+              <a:rPr>
+                <a:solidFill>
+                  <a:srgbClr val="4758AB"/>
+                </a:solidFill>
+                <a:latin typeface="Courier"/>
+              </a:rPr>
+              <a:t>xlim</a:t>
+            </a:r>
+            <a:r>
+              <a:rPr>
+                <a:solidFill>
+                  <a:srgbClr val="003B4F"/>
+                </a:solidFill>
+                <a:latin typeface="Courier"/>
+              </a:rPr>
+              <a:t>(</a:t>
+            </a:r>
+            <a:r>
+              <a:rPr>
+                <a:solidFill>
+                  <a:srgbClr val="AD0000"/>
+                </a:solidFill>
+                <a:latin typeface="Courier"/>
+              </a:rPr>
+              <a:t>50</a:t>
+            </a:r>
+            <a:r>
+              <a:rPr>
+                <a:solidFill>
+                  <a:srgbClr val="003B4F"/>
+                </a:solidFill>
+                <a:latin typeface="Courier"/>
+              </a:rPr>
               <a:t>, </a:t>
             </a:r>
             <a:r>
               <a:rPr>
                 <a:solidFill>
+                  <a:srgbClr val="AD0000"/>
+                </a:solidFill>
+                <a:latin typeface="Courier"/>
+              </a:rPr>
+              <a:t>70</a:t>
+            </a:r>
+            <a:r>
+              <a:rPr>
+                <a:solidFill>
+                  <a:srgbClr val="003B4F"/>
+                </a:solidFill>
+                <a:latin typeface="Courier"/>
+              </a:rPr>
+              <a:t>) </a:t>
+            </a:r>
+            <a:r>
+              <a:rPr>
+                <a:solidFill>
+                  <a:srgbClr val="5E5E5E"/>
+                </a:solidFill>
+                <a:latin typeface="Courier"/>
+              </a:rPr>
+              <a:t>+</a:t>
+            </a:r>
+            <a:br/>
+            <a:r>
+              <a:rPr>
+                <a:solidFill>
+                  <a:srgbClr val="003B4F"/>
+                </a:solidFill>
+                <a:latin typeface="Courier"/>
+              </a:rPr>
+              <a:t>  </a:t>
+            </a:r>
+            <a:r>
+              <a:rPr>
+                <a:solidFill>
+                  <a:srgbClr val="4758AB"/>
+                </a:solidFill>
+                <a:latin typeface="Courier"/>
+              </a:rPr>
+              <a:t>labs</a:t>
+            </a:r>
+            <a:r>
+              <a:rPr>
+                <a:solidFill>
+                  <a:srgbClr val="003B4F"/>
+                </a:solidFill>
+                <a:latin typeface="Courier"/>
+              </a:rPr>
+              <a:t>(</a:t>
+            </a:r>
+            <a:br/>
+            <a:r>
+              <a:rPr>
+                <a:solidFill>
+                  <a:srgbClr val="003B4F"/>
+                </a:solidFill>
+                <a:latin typeface="Courier"/>
+              </a:rPr>
+              <a:t>    </a:t>
+            </a:r>
+            <a:r>
+              <a:rPr>
+                <a:solidFill>
                   <a:srgbClr val="657422"/>
                 </a:solidFill>
                 <a:latin typeface="Courier"/>
               </a:rPr>
-              <a:t>fill =</a:t>
+              <a:t>title =</a:t>
             </a:r>
             <a:r>
               <a:rPr>
@@ -5044,16 +5034,26 @@
                 </a:solidFill>
                 <a:latin typeface="Courier"/>
               </a:rPr>
-              <a:t>"tomato"</a:t>
-            </a:r>
-            <a:r>
-              <a:rPr>
-                <a:solidFill>
-                  <a:srgbClr val="003B4F"/>
-                </a:solidFill>
-                <a:latin typeface="Courier"/>
-              </a:rPr>
-              <a:t>, </a:t>
+              <a:t>"xlim() — trend line refit on fewer leaves"</a:t>
+            </a:r>
+            <a:r>
+              <a:rPr>
+                <a:solidFill>
+                  <a:srgbClr val="003B4F"/>
+                </a:solidFill>
+                <a:latin typeface="Courier"/>
+              </a:rPr>
+              <a:t>,</a:t>
+            </a:r>
+            <a:br/>
+            <a:r>
+              <a:rPr>
+                <a:solidFill>
+                  <a:srgbClr val="003B4F"/>
+                </a:solidFill>
+                <a:latin typeface="Courier"/>
+              </a:rPr>
+              <a:t>    </a:t>
             </a:r>
             <a:r>
               <a:rPr>
@@ -5062,7 +5062,7 @@
                 </a:solidFill>
                 <a:latin typeface="Courier"/>
               </a:rPr>
-              <a:t>alpha =</a:t>
+              <a:t>x =</a:t>
             </a:r>
             <a:r>
               <a:rPr>
@@ -5076,29 +5076,20 @@
             <a:r>
               <a:rPr>
                 <a:solidFill>
-                  <a:srgbClr val="AD0000"/>
-                </a:solidFill>
-                <a:latin typeface="Courier"/>
-              </a:rPr>
-              <a:t>0.15</a:t>
-            </a:r>
-            <a:r>
-              <a:rPr>
-                <a:solidFill>
-                  <a:srgbClr val="003B4F"/>
-                </a:solidFill>
-                <a:latin typeface="Courier"/>
-              </a:rPr>
-              <a:t>) </a:t>
-            </a:r>
-            <a:r>
-              <a:rPr>
-                <a:solidFill>
-                  <a:srgbClr val="5E5E5E"/>
-                </a:solidFill>
-                <a:latin typeface="Courier"/>
-              </a:rPr>
-              <a:t>+</a:t>
+                  <a:srgbClr val="20794D"/>
+                </a:solidFill>
+                <a:latin typeface="Courier"/>
+              </a:rPr>
+              <a:t>"Petiole Length (mm)"</a:t>
+            </a:r>
+            <a:r>
+              <a:rPr>
+                <a:solidFill>
+                  <a:srgbClr val="003B4F"/>
+                </a:solidFill>
+                <a:latin typeface="Courier"/>
+              </a:rPr>
+              <a:t>,</a:t>
             </a:r>
             <a:br/>
             <a:r>
@@ -5108,263 +5099,7 @@
                 </a:solidFill>
                 <a:latin typeface="Courier"/>
               </a:rPr>
-              <a:t>  </a:t>
-            </a:r>
-            <a:r>
-              <a:rPr>
-                <a:solidFill>
-                  <a:srgbClr val="4758AB"/>
-                </a:solidFill>
-                <a:latin typeface="Courier"/>
-              </a:rPr>
-              <a:t>xlim</a:t>
-            </a:r>
-            <a:r>
-              <a:rPr>
-                <a:solidFill>
-                  <a:srgbClr val="003B4F"/>
-                </a:solidFill>
-                <a:latin typeface="Courier"/>
-              </a:rPr>
-              <a:t>(</a:t>
-            </a:r>
-            <a:r>
-              <a:rPr>
-                <a:solidFill>
-                  <a:srgbClr val="AD0000"/>
-                </a:solidFill>
-                <a:latin typeface="Courier"/>
-              </a:rPr>
-              <a:t>50</a:t>
-            </a:r>
-            <a:r>
-              <a:rPr>
-                <a:solidFill>
-                  <a:srgbClr val="003B4F"/>
-                </a:solidFill>
-                <a:latin typeface="Courier"/>
-              </a:rPr>
-              <a:t>, </a:t>
-            </a:r>
-            <a:r>
-              <a:rPr>
-                <a:solidFill>
-                  <a:srgbClr val="AD0000"/>
-                </a:solidFill>
-                <a:latin typeface="Courier"/>
-              </a:rPr>
-              <a:t>70</a:t>
-            </a:r>
-            <a:r>
-              <a:rPr>
-                <a:solidFill>
-                  <a:srgbClr val="003B4F"/>
-                </a:solidFill>
-                <a:latin typeface="Courier"/>
-              </a:rPr>
-              <a:t>) </a:t>
-            </a:r>
-            <a:r>
-              <a:rPr>
-                <a:solidFill>
-                  <a:srgbClr val="5E5E5E"/>
-                </a:solidFill>
-                <a:latin typeface="Courier"/>
-              </a:rPr>
-              <a:t>+</a:t>
-            </a:r>
-            <a:br/>
-            <a:r>
-              <a:rPr>
-                <a:solidFill>
-                  <a:srgbClr val="003B4F"/>
-                </a:solidFill>
-                <a:latin typeface="Courier"/>
-              </a:rPr>
-              <a:t>  </a:t>
-            </a:r>
-            <a:r>
-              <a:rPr>
-                <a:solidFill>
-                  <a:srgbClr val="4758AB"/>
-                </a:solidFill>
-                <a:latin typeface="Courier"/>
-              </a:rPr>
-              <a:t>ylim</a:t>
-            </a:r>
-            <a:r>
-              <a:rPr>
-                <a:solidFill>
-                  <a:srgbClr val="003B4F"/>
-                </a:solidFill>
-                <a:latin typeface="Courier"/>
-              </a:rPr>
-              <a:t>(</a:t>
-            </a:r>
-            <a:r>
-              <a:rPr>
-                <a:solidFill>
-                  <a:srgbClr val="AD0000"/>
-                </a:solidFill>
-                <a:latin typeface="Courier"/>
-              </a:rPr>
-              <a:t>0.4</a:t>
-            </a:r>
-            <a:r>
-              <a:rPr>
-                <a:solidFill>
-                  <a:srgbClr val="003B4F"/>
-                </a:solidFill>
-                <a:latin typeface="Courier"/>
-              </a:rPr>
-              <a:t>, </a:t>
-            </a:r>
-            <a:r>
-              <a:rPr>
-                <a:solidFill>
-                  <a:srgbClr val="AD0000"/>
-                </a:solidFill>
-                <a:latin typeface="Courier"/>
-              </a:rPr>
-              <a:t>0.6</a:t>
-            </a:r>
-            <a:r>
-              <a:rPr>
-                <a:solidFill>
-                  <a:srgbClr val="003B4F"/>
-                </a:solidFill>
-                <a:latin typeface="Courier"/>
-              </a:rPr>
-              <a:t>) </a:t>
-            </a:r>
-            <a:r>
-              <a:rPr>
-                <a:solidFill>
-                  <a:srgbClr val="5E5E5E"/>
-                </a:solidFill>
-                <a:latin typeface="Courier"/>
-              </a:rPr>
-              <a:t>+</a:t>
-            </a:r>
-            <a:br/>
-            <a:r>
-              <a:rPr>
-                <a:solidFill>
-                  <a:srgbClr val="003B4F"/>
-                </a:solidFill>
-                <a:latin typeface="Courier"/>
-              </a:rPr>
-              <a:t>  </a:t>
-            </a:r>
-            <a:r>
-              <a:rPr>
-                <a:solidFill>
-                  <a:srgbClr val="4758AB"/>
-                </a:solidFill>
-                <a:latin typeface="Courier"/>
-              </a:rPr>
-              <a:t>labs</a:t>
-            </a:r>
-            <a:r>
-              <a:rPr>
-                <a:solidFill>
-                  <a:srgbClr val="003B4F"/>
-                </a:solidFill>
-                <a:latin typeface="Courier"/>
-              </a:rPr>
-              <a:t>(</a:t>
-            </a:r>
-            <a:br/>
-            <a:r>
-              <a:rPr>
-                <a:solidFill>
-                  <a:srgbClr val="003B4F"/>
-                </a:solidFill>
-                <a:latin typeface="Courier"/>
-              </a:rPr>
               <a:t>    </a:t>
-            </a:r>
-            <a:r>
-              <a:rPr>
-                <a:solidFill>
-                  <a:srgbClr val="657422"/>
-                </a:solidFill>
-                <a:latin typeface="Courier"/>
-              </a:rPr>
-              <a:t>title =</a:t>
-            </a:r>
-            <a:r>
-              <a:rPr>
-                <a:solidFill>
-                  <a:srgbClr val="003B4F"/>
-                </a:solidFill>
-                <a:latin typeface="Courier"/>
-              </a:rPr>
-              <a:t> </a:t>
-            </a:r>
-            <a:r>
-              <a:rPr>
-                <a:solidFill>
-                  <a:srgbClr val="20794D"/>
-                </a:solidFill>
-                <a:latin typeface="Courier"/>
-              </a:rPr>
-              <a:t>"Zoomed with xlim() / ylim() — different line!"</a:t>
-            </a:r>
-            <a:r>
-              <a:rPr>
-                <a:solidFill>
-                  <a:srgbClr val="003B4F"/>
-                </a:solidFill>
-                <a:latin typeface="Courier"/>
-              </a:rPr>
-              <a:t>,</a:t>
-            </a:r>
-            <a:br/>
-            <a:r>
-              <a:rPr>
-                <a:solidFill>
-                  <a:srgbClr val="003B4F"/>
-                </a:solidFill>
-                <a:latin typeface="Courier"/>
-              </a:rPr>
-              <a:t>    </a:t>
-            </a:r>
-            <a:r>
-              <a:rPr>
-                <a:solidFill>
-                  <a:srgbClr val="657422"/>
-                </a:solidFill>
-                <a:latin typeface="Courier"/>
-              </a:rPr>
-              <a:t>x =</a:t>
-            </a:r>
-            <a:r>
-              <a:rPr>
-                <a:solidFill>
-                  <a:srgbClr val="003B4F"/>
-                </a:solidFill>
-                <a:latin typeface="Courier"/>
-              </a:rPr>
-              <a:t> </a:t>
-            </a:r>
-            <a:r>
-              <a:rPr>
-                <a:solidFill>
-                  <a:srgbClr val="20794D"/>
-                </a:solidFill>
-                <a:latin typeface="Courier"/>
-              </a:rPr>
-              <a:t>"Petiole Length (mm)"</a:t>
-            </a:r>
-            <a:r>
-              <a:rPr>
-                <a:solidFill>
-                  <a:srgbClr val="003B4F"/>
-                </a:solidFill>
-                <a:latin typeface="Courier"/>
-              </a:rPr>
-              <a:t>, </a:t>
             </a:r>
             <a:r>
               <a:rPr>
@@ -5517,7 +5252,7 @@
             </a:r>
             <a:r>
               <a:rPr sz="2000"/>
-              <a:t>/</a:t>
+              <a:t> / </a:t>
             </a:r>
             <a:r>
               <a:rPr sz="2000">
@@ -5531,7 +5266,7 @@
             </a:r>
             <a:r>
               <a:rPr sz="2000" b="1"/>
-              <a:t>silently delete rows</a:t>
+              <a:t>silently delete every row</a:t>
             </a:r>
             <a:r>
               <a:rPr sz="2000"/>
@@ -5543,7 +5278,7 @@
             </a:r>
             <a:r>
               <a:rPr sz="2000"/>
-              <a:t> anything is computed. The trend line above is fit only on the leaves that remain — a different line than </a:t>
+              <a:t> anything is computed. The line above is fit only on the leaves that remain — a different line than </a:t>
             </a:r>
             <a:r>
               <a:rPr sz="2000">
@@ -5553,7 +5288,7 @@
             </a:r>
             <a:r>
               <a:rPr sz="2000"/>
-              <a:t> produced, with no warning that data went missing.</a:t>
+              <a:t> gave, with no warning.</a:t>
             </a:r>
           </a:p>
           <a:p>
@@ -5562,11 +5297,11 @@
             </a:pPr>
             <a:r>
               <a:rPr b="1"/>
-              <a:t>Rule of thumb:</a:t>
+              <a:t>Rule:</a:t>
             </a:r>
             <a:r>
               <a:rPr/>
-              <a:t> use </a:t>
+              <a:t> zoom with </a:t>
             </a:r>
             <a:r>
               <a:rPr>
@@ -5576,7 +5311,7 @@
             </a:r>
             <a:r>
               <a:rPr/>
-              <a:t> to zoom. Only use </a:t>
+              <a:t>. Only use </a:t>
             </a:r>
             <a:r>
               <a:rPr>
@@ -5586,7 +5321,7 @@
             </a:r>
             <a:r>
               <a:rPr/>
-              <a:t>/</a:t>
+              <a:t> / </a:t>
             </a:r>
             <a:r>
               <a:rPr>
@@ -5596,7 +5331,7 @@
             </a:r>
             <a:r>
               <a:rPr/>
-              <a:t> when you actually want those rows excluded from the analysis, not just out of view.</a:t>
+              <a:t> when you actually want those rows gone from the analysis.</a:t>
             </a:r>
           </a:p>
         </p:txBody>
@@ -5682,7 +5417,27 @@
             </a:pPr>
             <a:r>
               <a:rPr/>
-              <a:t>Zoom the same plot two ways and compare the trend lines. Predict, type, run.</a:t>
+              <a:t>Zoom with </a:t>
+            </a:r>
+            <a:r>
+              <a:rPr>
+                <a:latin typeface="Courier"/>
+              </a:rPr>
+              <a:t>coord_cartesian()</a:t>
+            </a:r>
+            <a:r>
+              <a:rPr/>
+              <a:t>, then run the </a:t>
+            </a:r>
+            <a:r>
+              <a:rPr>
+                <a:latin typeface="Courier"/>
+              </a:rPr>
+              <a:t>xlim()</a:t>
+            </a:r>
+            <a:r>
+              <a:rPr/>
+              <a:t> version once and watch the line move. Predict, type, run.</a:t>
             </a:r>
           </a:p>
         </p:txBody>
@@ -6141,6 +5896,16 @@
               </a:rPr>
               <a:t>(</a:t>
             </a:r>
+            <a:br/>
+            <a:r>
+              <a:rPr>
+                <a:solidFill>
+                  <a:srgbClr val="003B4F"/>
+                </a:solidFill>
+                <a:latin typeface="Courier"/>
+              </a:rPr>
+              <a:t>    </a:t>
+            </a:r>
             <a:r>
               <a:rPr>
                 <a:solidFill>
@@ -6247,7 +6012,17 @@
                 </a:solidFill>
                 <a:latin typeface="Courier"/>
               </a:rPr>
-              <a:t>)) </a:t>
+              <a:t>)</a:t>
+            </a:r>
+            <a:br/>
+            <a:r>
+              <a:rPr>
+                <a:solidFill>
+                  <a:srgbClr val="003B4F"/>
+                </a:solidFill>
+                <a:latin typeface="Courier"/>
+              </a:rPr>
+              <a:t>  ) </a:t>
             </a:r>
             <a:r>
               <a:rPr>
@@ -6557,7 +6332,7 @@
             </a:pPr>
             <a:r>
               <a:rPr b="1"/>
-              <a:t>Five built-in themes to try on the same plot:</a:t>
+              <a:t>A few built-in themes worth knowing:</a:t>
             </a:r>
           </a:p>
         </p:txBody>
@@ -6648,41 +6423,7 @@
                       </a:pPr>
                       <a:r>
                         <a:rPr/>
-                        <a:t>default — grey background</a:t>
-                      </a:r>
-                    </a:p>
-                  </a:txBody>
-                </a:tc>
-              </a:tr>
-              <a:tr h="0">
-                <a:tc>
-                  <a:txBody>
-                    <a:bodyPr/>
-                    <a:lstStyle/>
-                    <a:p>
-                      <a:pPr lvl="0" indent="0" marL="0">
-                        <a:buNone/>
-                      </a:pPr>
-                      <a:r>
-                        <a:rPr>
-                          <a:latin typeface="Courier"/>
-                        </a:rPr>
-                        <a:t>theme_bw()</a:t>
-                      </a:r>
-                    </a:p>
-                  </a:txBody>
-                </a:tc>
-                <a:tc>
-                  <a:txBody>
-                    <a:bodyPr/>
-                    <a:lstStyle/>
-                    <a:p>
-                      <a:pPr lvl="0" indent="0" marL="0">
-                        <a:buNone/>
-                      </a:pPr>
-                      <a:r>
-                        <a:rPr/>
-                        <a:t>white background, grey gridlines</a:t>
+                        <a:t>the default — grey background</a:t>
                       </a:r>
                     </a:p>
                   </a:txBody>
@@ -6716,7 +6457,7 @@
                       </a:pPr>
                       <a:r>
                         <a:rPr/>
-                        <a:t>no background, subtle gridlines</a:t>
+                        <a:t>no background, faint gridlines</a:t>
                       </a:r>
                     </a:p>
                   </a:txBody>
@@ -6756,40 +6497,6 @@
                   </a:txBody>
                 </a:tc>
               </a:tr>
-              <a:tr h="0">
-                <a:tc>
-                  <a:txBody>
-                    <a:bodyPr/>
-                    <a:lstStyle/>
-                    <a:p>
-                      <a:pPr lvl="0" indent="0" marL="0">
-                        <a:buNone/>
-                      </a:pPr>
-                      <a:r>
-                        <a:rPr>
-                          <a:latin typeface="Courier"/>
-                        </a:rPr>
-                        <a:t>theme_light()</a:t>
-                      </a:r>
-                    </a:p>
-                  </a:txBody>
-                </a:tc>
-                <a:tc>
-                  <a:txBody>
-                    <a:bodyPr/>
-                    <a:lstStyle/>
-                    <a:p>
-                      <a:pPr lvl="0" indent="0" marL="0">
-                        <a:buNone/>
-                      </a:pPr>
-                      <a:r>
-                        <a:rPr/>
-                        <a:t>light grey lines and border</a:t>
-                      </a:r>
-                    </a:p>
-                  </a:txBody>
-                </a:tc>
-              </a:tr>
             </a:tbl>
           </a:graphicData>
         </a:graphic>
@@ -6829,7 +6536,7 @@
             </a:r>
             <a:r>
               <a:rPr sz="2000"/>
-              <a:t> is a safe default for scientific figures — clean, uncluttered, close to what most journals expect.</a:t>
+              <a:t> is a safe default for scientific figures — clean, uncluttered, close to what most journals expect. Pick one you like and use it everywhere.</a:t>
             </a:r>
           </a:p>
         </p:txBody>
@@ -7184,6 +6891,16 @@
               </a:rPr>
               <a:t>(</a:t>
             </a:r>
+            <a:br/>
+            <a:r>
+              <a:rPr>
+                <a:solidFill>
+                  <a:srgbClr val="003B4F"/>
+                </a:solidFill>
+                <a:latin typeface="Courier"/>
+              </a:rPr>
+              <a:t>    </a:t>
+            </a:r>
             <a:r>
               <a:rPr>
                 <a:solidFill>
@@ -7290,7 +7007,17 @@
                 </a:solidFill>
                 <a:latin typeface="Courier"/>
               </a:rPr>
-              <a:t>)) </a:t>
+              <a:t>)</a:t>
+            </a:r>
+            <a:br/>
+            <a:r>
+              <a:rPr>
+                <a:solidFill>
+                  <a:srgbClr val="003B4F"/>
+                </a:solidFill>
+                <a:latin typeface="Courier"/>
+              </a:rPr>
+              <a:t>  ) </a:t>
             </a:r>
             <a:r>
               <a:rPr>
@@ -7511,16 +7238,6 @@
               </a:rPr>
               <a:t>(</a:t>
             </a:r>
-            <a:br/>
-            <a:r>
-              <a:rPr>
-                <a:solidFill>
-                  <a:srgbClr val="003B4F"/>
-                </a:solidFill>
-                <a:latin typeface="Courier"/>
-              </a:rPr>
-              <a:t>    </a:t>
-            </a:r>
             <a:r>
               <a:rPr>
                 <a:solidFill>
@@ -7555,181 +7272,7 @@
                 </a:solidFill>
                 <a:latin typeface="Courier"/>
               </a:rPr>
-              <a:t>,</a:t>
-            </a:r>
-            <a:br/>
-            <a:r>
-              <a:rPr>
-                <a:solidFill>
-                  <a:srgbClr val="003B4F"/>
-                </a:solidFill>
-                <a:latin typeface="Courier"/>
-              </a:rPr>
-              <a:t>    </a:t>
-            </a:r>
-            <a:r>
-              <a:rPr>
-                <a:solidFill>
-                  <a:srgbClr val="657422"/>
-                </a:solidFill>
-                <a:latin typeface="Courier"/>
-              </a:rPr>
-              <a:t>axis.text =</a:t>
-            </a:r>
-            <a:r>
-              <a:rPr>
-                <a:solidFill>
-                  <a:srgbClr val="003B4F"/>
-                </a:solidFill>
-                <a:latin typeface="Courier"/>
-              </a:rPr>
-              <a:t> </a:t>
-            </a:r>
-            <a:r>
-              <a:rPr>
-                <a:solidFill>
-                  <a:srgbClr val="4758AB"/>
-                </a:solidFill>
-                <a:latin typeface="Courier"/>
-              </a:rPr>
-              <a:t>element_text</a:t>
-            </a:r>
-            <a:r>
-              <a:rPr>
-                <a:solidFill>
-                  <a:srgbClr val="003B4F"/>
-                </a:solidFill>
-                <a:latin typeface="Courier"/>
-              </a:rPr>
-              <a:t>(</a:t>
-            </a:r>
-            <a:r>
-              <a:rPr>
-                <a:solidFill>
-                  <a:srgbClr val="657422"/>
-                </a:solidFill>
-                <a:latin typeface="Courier"/>
-              </a:rPr>
-              <a:t>size =</a:t>
-            </a:r>
-            <a:r>
-              <a:rPr>
-                <a:solidFill>
-                  <a:srgbClr val="003B4F"/>
-                </a:solidFill>
-                <a:latin typeface="Courier"/>
-              </a:rPr>
-              <a:t> </a:t>
-            </a:r>
-            <a:r>
-              <a:rPr>
-                <a:solidFill>
-                  <a:srgbClr val="AD0000"/>
-                </a:solidFill>
-                <a:latin typeface="Courier"/>
-              </a:rPr>
-              <a:t>12</a:t>
-            </a:r>
-            <a:r>
-              <a:rPr>
-                <a:solidFill>
-                  <a:srgbClr val="003B4F"/>
-                </a:solidFill>
-                <a:latin typeface="Courier"/>
-              </a:rPr>
-              <a:t>),</a:t>
-            </a:r>
-            <a:br/>
-            <a:r>
-              <a:rPr>
-                <a:solidFill>
-                  <a:srgbClr val="003B4F"/>
-                </a:solidFill>
-                <a:latin typeface="Courier"/>
-              </a:rPr>
-              <a:t>    </a:t>
-            </a:r>
-            <a:r>
-              <a:rPr>
-                <a:solidFill>
-                  <a:srgbClr val="657422"/>
-                </a:solidFill>
-                <a:latin typeface="Courier"/>
-              </a:rPr>
-              <a:t>axis.title =</a:t>
-            </a:r>
-            <a:r>
-              <a:rPr>
-                <a:solidFill>
-                  <a:srgbClr val="003B4F"/>
-                </a:solidFill>
-                <a:latin typeface="Courier"/>
-              </a:rPr>
-              <a:t> </a:t>
-            </a:r>
-            <a:r>
-              <a:rPr>
-                <a:solidFill>
-                  <a:srgbClr val="4758AB"/>
-                </a:solidFill>
-                <a:latin typeface="Courier"/>
-              </a:rPr>
-              <a:t>element_text</a:t>
-            </a:r>
-            <a:r>
-              <a:rPr>
-                <a:solidFill>
-                  <a:srgbClr val="003B4F"/>
-                </a:solidFill>
-                <a:latin typeface="Courier"/>
-              </a:rPr>
-              <a:t>(</a:t>
-            </a:r>
-            <a:r>
-              <a:rPr>
-                <a:solidFill>
-                  <a:srgbClr val="657422"/>
-                </a:solidFill>
-                <a:latin typeface="Courier"/>
-              </a:rPr>
-              <a:t>size =</a:t>
-            </a:r>
-            <a:r>
-              <a:rPr>
-                <a:solidFill>
-                  <a:srgbClr val="003B4F"/>
-                </a:solidFill>
-                <a:latin typeface="Courier"/>
-              </a:rPr>
-              <a:t> </a:t>
-            </a:r>
-            <a:r>
-              <a:rPr>
-                <a:solidFill>
-                  <a:srgbClr val="AD0000"/>
-                </a:solidFill>
-                <a:latin typeface="Courier"/>
-              </a:rPr>
-              <a:t>13</a:t>
-            </a:r>
-            <a:r>
-              <a:rPr>
-                <a:solidFill>
-                  <a:srgbClr val="003B4F"/>
-                </a:solidFill>
-                <a:latin typeface="Courier"/>
-              </a:rPr>
               <a:t>)</a:t>
-            </a:r>
-            <a:br/>
-            <a:r>
-              <a:rPr>
-                <a:solidFill>
-                  <a:srgbClr val="003B4F"/>
-                </a:solidFill>
-                <a:latin typeface="Courier"/>
-              </a:rPr>
-              <a:t>  )</a:t>
             </a:r>
           </a:p>
         </p:txBody>
@@ -7823,30 +7366,40 @@
             </a:r>
             <a:r>
               <a:rPr/>
-              <a:t> — drop a redundant legend</a:t>
+              <a:t> — drop a legend that just repeats the x-axis, as </a:t>
+            </a:r>
+            <a:r>
+              <a:rPr>
+                <a:latin typeface="Courier"/>
+              </a:rPr>
+              <a:t>fill = shade</a:t>
+            </a:r>
+            <a:r>
+              <a:rPr/>
+              <a:t> does here</a:t>
             </a:r>
           </a:p>
           <a:p>
             <a:pPr lvl="0"/>
             <a:r>
-              <a:rPr>
-                <a:latin typeface="Courier"/>
-              </a:rPr>
-              <a:t>axis.text</a:t>
-            </a:r>
-            <a:r>
               <a:rPr/>
-              <a:t> / </a:t>
-            </a:r>
-            <a:r>
-              <a:rPr>
-                <a:latin typeface="Courier"/>
-              </a:rPr>
-              <a:t>axis.title</a:t>
+              <a:t>Other common tweaks: </a:t>
+            </a:r>
+            <a:r>
+              <a:rPr>
+                <a:latin typeface="Courier"/>
+              </a:rPr>
+              <a:t>plot.title = element_text(face = "bold")</a:t>
             </a:r>
             <a:r>
               <a:rPr/>
-              <a:t> — control tick labels and axis titles separately</a:t>
+              <a:t>, </a:t>
+            </a:r>
+            <a:r>
+              <a:rPr>
+                <a:latin typeface="Courier"/>
+              </a:rPr>
+              <a:t>axis.text = element_text(size = 12)</a:t>
             </a:r>
           </a:p>
           <a:p>
@@ -8215,6 +7768,16 @@
               </a:rPr>
               <a:t>(</a:t>
             </a:r>
+            <a:br/>
+            <a:r>
+              <a:rPr>
+                <a:solidFill>
+                  <a:srgbClr val="003B4F"/>
+                </a:solidFill>
+                <a:latin typeface="Courier"/>
+              </a:rPr>
+              <a:t>    </a:t>
+            </a:r>
             <a:r>
               <a:rPr>
                 <a:solidFill>
@@ -8321,7 +7884,17 @@
                 </a:solidFill>
                 <a:latin typeface="Courier"/>
               </a:rPr>
-              <a:t>)) </a:t>
+              <a:t>)</a:t>
+            </a:r>
+            <a:br/>
+            <a:r>
+              <a:rPr>
+                <a:solidFill>
+                  <a:srgbClr val="003B4F"/>
+                </a:solidFill>
+                <a:latin typeface="Courier"/>
+              </a:rPr>
+              <a:t>  ) </a:t>
             </a:r>
             <a:r>
               <a:rPr>
@@ -8572,6 +8145,16 @@
               </a:rPr>
               <a:t>(</a:t>
             </a:r>
+            <a:br/>
+            <a:r>
+              <a:rPr>
+                <a:solidFill>
+                  <a:srgbClr val="003B4F"/>
+                </a:solidFill>
+                <a:latin typeface="Courier"/>
+              </a:rPr>
+              <a:t>  </a:t>
+            </a:r>
             <a:r>
               <a:rPr>
                 <a:solidFill>
@@ -8598,7 +8181,7 @@
                 </a:solidFill>
                 <a:latin typeface="Courier"/>
               </a:rPr>
-              <a:t>       </a:t>
+              <a:t>  </a:t>
             </a:r>
             <a:r>
               <a:rPr>
@@ -8616,7 +8199,17 @@
                 </a:solidFill>
                 <a:latin typeface="Courier"/>
               </a:rPr>
-              <a:t> leaf_plot, </a:t>
+              <a:t> leaf_plot,</a:t>
+            </a:r>
+            <a:br/>
+            <a:r>
+              <a:rPr>
+                <a:solidFill>
+                  <a:srgbClr val="003B4F"/>
+                </a:solidFill>
+                <a:latin typeface="Courier"/>
+              </a:rPr>
+              <a:t>  </a:t>
             </a:r>
             <a:r>
               <a:rPr>
@@ -8652,7 +8245,17 @@
                 </a:solidFill>
                 <a:latin typeface="Courier"/>
               </a:rPr>
-              <a:t>, </a:t>
+              <a:t>,</a:t>
+            </a:r>
+            <a:br/>
+            <a:r>
+              <a:rPr>
+                <a:solidFill>
+                  <a:srgbClr val="003B4F"/>
+                </a:solidFill>
+                <a:latin typeface="Courier"/>
+              </a:rPr>
+              <a:t>  </a:t>
             </a:r>
             <a:r>
               <a:rPr>
@@ -8698,7 +8301,7 @@
                 </a:solidFill>
                 <a:latin typeface="Courier"/>
               </a:rPr>
-              <a:t>       </a:t>
+              <a:t>  </a:t>
             </a:r>
             <a:r>
               <a:rPr>
@@ -8734,7 +8337,17 @@
                 </a:solidFill>
                 <a:latin typeface="Courier"/>
               </a:rPr>
-              <a:t>, </a:t>
+              <a:t>,</a:t>
+            </a:r>
+            <a:br/>
+            <a:r>
+              <a:rPr>
+                <a:solidFill>
+                  <a:srgbClr val="003B4F"/>
+                </a:solidFill>
+                <a:latin typeface="Courier"/>
+              </a:rPr>
+              <a:t>  </a:t>
             </a:r>
             <a:r>
               <a:rPr>
@@ -8763,6 +8376,7 @@
               </a:rPr>
               <a:t>300</a:t>
             </a:r>
+            <a:br/>
             <a:r>
               <a:rPr>
                 <a:solidFill>
@@ -8802,6 +8416,16 @@
               </a:rPr>
               <a:t>(</a:t>
             </a:r>
+            <a:br/>
+            <a:r>
+              <a:rPr>
+                <a:solidFill>
+                  <a:srgbClr val="003B4F"/>
+                </a:solidFill>
+                <a:latin typeface="Courier"/>
+              </a:rPr>
+              <a:t>  </a:t>
+            </a:r>
             <a:r>
               <a:rPr>
                 <a:solidFill>
@@ -8828,7 +8452,7 @@
                 </a:solidFill>
                 <a:latin typeface="Courier"/>
               </a:rPr>
-              <a:t>       </a:t>
+              <a:t>  </a:t>
             </a:r>
             <a:r>
               <a:rPr>
@@ -8846,7 +8470,17 @@
                 </a:solidFill>
                 <a:latin typeface="Courier"/>
               </a:rPr>
-              <a:t> leaf_plot, </a:t>
+              <a:t> leaf_plot,</a:t>
+            </a:r>
+            <a:br/>
+            <a:r>
+              <a:rPr>
+                <a:solidFill>
+                  <a:srgbClr val="003B4F"/>
+                </a:solidFill>
+                <a:latin typeface="Courier"/>
+              </a:rPr>
+              <a:t>  </a:t>
             </a:r>
             <a:r>
               <a:rPr>
@@ -8882,7 +8516,17 @@
                 </a:solidFill>
                 <a:latin typeface="Courier"/>
               </a:rPr>
-              <a:t>, </a:t>
+              <a:t>,</a:t>
+            </a:r>
+            <a:br/>
+            <a:r>
+              <a:rPr>
+                <a:solidFill>
+                  <a:srgbClr val="003B4F"/>
+                </a:solidFill>
+                <a:latin typeface="Courier"/>
+              </a:rPr>
+              <a:t>  </a:t>
             </a:r>
             <a:r>
               <a:rPr>
@@ -8918,7 +8562,17 @@
                 </a:solidFill>
                 <a:latin typeface="Courier"/>
               </a:rPr>
-              <a:t>, </a:t>
+              <a:t>,</a:t>
+            </a:r>
+            <a:br/>
+            <a:r>
+              <a:rPr>
+                <a:solidFill>
+                  <a:srgbClr val="003B4F"/>
+                </a:solidFill>
+                <a:latin typeface="Courier"/>
+              </a:rPr>
+              <a:t>  </a:t>
             </a:r>
             <a:r>
               <a:rPr>
@@ -8947,6 +8601,7 @@
               </a:rPr>
               <a:t>"in"</a:t>
             </a:r>
+            <a:br/>
             <a:r>
               <a:rPr>
                 <a:solidFill>
@@ -9584,7 +9239,7 @@
             <a:pPr lvl="0"/>
             <a:r>
               <a:rPr/>
-              <a:t>Built-in themes (</a:t>
+              <a:t>Pick one built-in theme (</a:t>
             </a:r>
             <a:r>
               <a:rPr>
@@ -9594,17 +9249,17 @@
             </a:r>
             <a:r>
               <a:rPr/>
-              <a:t>, etc.) + </a:t>
-            </a:r>
-            <a:r>
-              <a:rPr>
-                <a:latin typeface="Courier"/>
-              </a:rPr>
-              <a:t>theme()</a:t>
+              <a:t>) and use </a:t>
+            </a:r>
+            <a:r>
+              <a:rPr>
+                <a:latin typeface="Courier"/>
+              </a:rPr>
+              <a:t>theme(legend.position = "none")</a:t>
             </a:r>
             <a:r>
               <a:rPr/>
-              <a:t> for small overrides</a:t>
+              <a:t> to drop a redundant legend</a:t>
             </a:r>
           </a:p>
           <a:p>
@@ -9863,7 +9518,7 @@
             </a:r>
             <a:r>
               <a:rPr/>
-              <a:t> and adjust it with </a:t>
+              <a:t> and drop a redundant legend with </a:t>
             </a:r>
             <a:r>
               <a:rPr>
@@ -10976,6 +10631,16 @@
               </a:rPr>
               <a:t>(</a:t>
             </a:r>
+            <a:br/>
+            <a:r>
+              <a:rPr>
+                <a:solidFill>
+                  <a:srgbClr val="003B4F"/>
+                </a:solidFill>
+                <a:latin typeface="Courier"/>
+              </a:rPr>
+              <a:t>    </a:t>
+            </a:r>
             <a:r>
               <a:rPr>
                 <a:solidFill>
@@ -11082,7 +10747,17 @@
                 </a:solidFill>
                 <a:latin typeface="Courier"/>
               </a:rPr>
-              <a:t>)) </a:t>
+              <a:t>)</a:t>
+            </a:r>
+            <a:br/>
+            <a:r>
+              <a:rPr>
+                <a:solidFill>
+                  <a:srgbClr val="003B4F"/>
+                </a:solidFill>
+                <a:latin typeface="Courier"/>
+              </a:rPr>
+              <a:t>  ) </a:t>
             </a:r>
             <a:r>
               <a:rPr>
@@ -11211,7 +10886,17 @@
                 </a:solidFill>
                 <a:latin typeface="Courier"/>
               </a:rPr>
-              <a:t>, </a:t>
+              <a:t>,</a:t>
+            </a:r>
+            <a:br/>
+            <a:r>
+              <a:rPr>
+                <a:solidFill>
+                  <a:srgbClr val="003B4F"/>
+                </a:solidFill>
+                <a:latin typeface="Courier"/>
+              </a:rPr>
+              <a:t>    </a:t>
             </a:r>
             <a:r>
               <a:rPr>
@@ -11293,7 +10978,17 @@
                 </a:solidFill>
                 <a:latin typeface="Courier"/>
               </a:rPr>
-              <a:t>, </a:t>
+              <a:t>,</a:t>
+            </a:r>
+            <a:br/>
+            <a:r>
+              <a:rPr>
+                <a:solidFill>
+                  <a:srgbClr val="003B4F"/>
+                </a:solidFill>
+                <a:latin typeface="Courier"/>
+              </a:rPr>
+              <a:t>    </a:t>
             </a:r>
             <a:r>
               <a:rPr>
@@ -12127,7 +11822,17 @@
                 </a:solidFill>
                 <a:latin typeface="Courier"/>
               </a:rPr>
-              <a:t>, </a:t>
+              <a:t>,</a:t>
+            </a:r>
+            <a:br/>
+            <a:r>
+              <a:rPr>
+                <a:solidFill>
+                  <a:srgbClr val="003B4F"/>
+                </a:solidFill>
+                <a:latin typeface="Courier"/>
+              </a:rPr>
+              <a:t>    </a:t>
             </a:r>
             <a:r>
               <a:rPr>

--- a/docs/content/ggplot_2/ggplot_2_lecture.pptx
+++ b/docs/content/ggplot_2/ggplot_2_lecture.pptx
@@ -3366,7 +3366,7 @@
             </a:pPr>
             <a:r>
               <a:rPr/>
-              <a:t>2026-09-14</a:t>
+              <a:t>2026-09-21</a:t>
             </a:r>
           </a:p>
         </p:txBody>

--- a/docs/content/ggplot_2/ggplot_2_lecture.pptx
+++ b/docs/content/ggplot_2/ggplot_2_lecture.pptx
@@ -3366,7 +3366,7 @@
             </a:pPr>
             <a:r>
               <a:rPr/>
-              <a:t>2026-09-21</a:t>
+              <a:t>2026-09-22</a:t>
             </a:r>
           </a:p>
         </p:txBody>

--- a/docs/content/ggplot_2/ggplot_2_lecture.pptx
+++ b/docs/content/ggplot_2/ggplot_2_lecture.pptx
@@ -3366,7 +3366,7 @@
             </a:pPr>
             <a:r>
               <a:rPr/>
-              <a:t>2026-09-22</a:t>
+              <a:t>2026-09-23</a:t>
             </a:r>
           </a:p>
         </p:txBody>

--- a/docs/content/ggplot_2/ggplot_2_lecture.pptx
+++ b/docs/content/ggplot_2/ggplot_2_lecture.pptx
@@ -5765,7 +5765,17 @@
                 </a:solidFill>
                 <a:latin typeface="Courier"/>
               </a:rPr>
-              <a:t>, </a:t>
+              <a:t>,</a:t>
+            </a:r>
+            <a:br/>
+            <a:r>
+              <a:rPr>
+                <a:solidFill>
+                  <a:srgbClr val="003B4F"/>
+                </a:solidFill>
+                <a:latin typeface="Courier"/>
+              </a:rPr>
+              <a:t>                 </a:t>
             </a:r>
             <a:r>
               <a:rPr>
@@ -7493,7 +7503,17 @@
                 </a:solidFill>
                 <a:latin typeface="Courier"/>
               </a:rPr>
-              <a:t>, </a:t>
+              <a:t>,</a:t>
+            </a:r>
+            <a:br/>
+            <a:r>
+              <a:rPr>
+                <a:solidFill>
+                  <a:srgbClr val="003B4F"/>
+                </a:solidFill>
+                <a:latin typeface="Courier"/>
+              </a:rPr>
+              <a:t>       </a:t>
             </a:r>
             <a:r>
               <a:rPr>
@@ -8221,34 +8241,163 @@
                 </a:solidFill>
                 <a:latin typeface="Courier"/>
               </a:rPr>
+              <a:t>,</a:t>
+            </a:r>
+            <a:br/>
+            <a:r>
+              <a:rPr>
+                <a:solidFill>
+                  <a:srgbClr val="003B4F"/>
+                </a:solidFill>
+                <a:latin typeface="Courier"/>
+              </a:rPr>
+              <a:t>    </a:t>
+            </a:r>
+            <a:r>
+              <a:rPr>
+                <a:solidFill>
+                  <a:srgbClr val="20794D"/>
+                </a:solidFill>
+                <a:latin typeface="Courier"/>
+              </a:rPr>
+              <a:t>"Gentoo"</a:t>
+            </a:r>
+            <a:r>
+              <a:rPr>
+                <a:solidFill>
+                  <a:srgbClr val="003B4F"/>
+                </a:solidFill>
+                <a:latin typeface="Courier"/>
+              </a:rPr>
+              <a:t> = </a:t>
+            </a:r>
+            <a:r>
+              <a:rPr>
+                <a:solidFill>
+                  <a:srgbClr val="20794D"/>
+                </a:solidFill>
+                <a:latin typeface="Courier"/>
+              </a:rPr>
+              <a:t>"cyan4"</a:t>
+            </a:r>
+            <a:br/>
+            <a:r>
+              <a:rPr>
+                <a:solidFill>
+                  <a:srgbClr val="003B4F"/>
+                </a:solidFill>
+                <a:latin typeface="Courier"/>
+              </a:rPr>
+              <a:t>  )) </a:t>
+            </a:r>
+            <a:r>
+              <a:rPr>
+                <a:solidFill>
+                  <a:srgbClr val="5E5E5E"/>
+                </a:solidFill>
+                <a:latin typeface="Courier"/>
+              </a:rPr>
+              <a:t>+</a:t>
+            </a:r>
+            <a:br/>
+            <a:r>
+              <a:rPr>
+                <a:solidFill>
+                  <a:srgbClr val="003B4F"/>
+                </a:solidFill>
+                <a:latin typeface="Courier"/>
+              </a:rPr>
+              <a:t>  </a:t>
+            </a:r>
+            <a:r>
+              <a:rPr>
+                <a:solidFill>
+                  <a:srgbClr val="4758AB"/>
+                </a:solidFill>
+                <a:latin typeface="Courier"/>
+              </a:rPr>
+              <a:t>labs</a:t>
+            </a:r>
+            <a:r>
+              <a:rPr>
+                <a:solidFill>
+                  <a:srgbClr val="003B4F"/>
+                </a:solidFill>
+                <a:latin typeface="Courier"/>
+              </a:rPr>
+              <a:t>(</a:t>
+            </a:r>
+            <a:r>
+              <a:rPr>
+                <a:solidFill>
+                  <a:srgbClr val="657422"/>
+                </a:solidFill>
+                <a:latin typeface="Courier"/>
+              </a:rPr>
+              <a:t>x =</a:t>
+            </a:r>
+            <a:r>
+              <a:rPr>
+                <a:solidFill>
+                  <a:srgbClr val="003B4F"/>
+                </a:solidFill>
+                <a:latin typeface="Courier"/>
+              </a:rPr>
+              <a:t> </a:t>
+            </a:r>
+            <a:r>
+              <a:rPr>
+                <a:solidFill>
+                  <a:srgbClr val="20794D"/>
+                </a:solidFill>
+                <a:latin typeface="Courier"/>
+              </a:rPr>
+              <a:t>"Species"</a:t>
+            </a:r>
+            <a:r>
+              <a:rPr>
+                <a:solidFill>
+                  <a:srgbClr val="003B4F"/>
+                </a:solidFill>
+                <a:latin typeface="Courier"/>
+              </a:rPr>
               <a:t>, </a:t>
             </a:r>
             <a:r>
               <a:rPr>
                 <a:solidFill>
+                  <a:srgbClr val="657422"/>
+                </a:solidFill>
+                <a:latin typeface="Courier"/>
+              </a:rPr>
+              <a:t>y =</a:t>
+            </a:r>
+            <a:r>
+              <a:rPr>
+                <a:solidFill>
+                  <a:srgbClr val="003B4F"/>
+                </a:solidFill>
+                <a:latin typeface="Courier"/>
+              </a:rPr>
+              <a:t> </a:t>
+            </a:r>
+            <a:r>
+              <a:rPr>
+                <a:solidFill>
                   <a:srgbClr val="20794D"/>
                 </a:solidFill>
                 <a:latin typeface="Courier"/>
               </a:rPr>
-              <a:t>"Gentoo"</a:t>
-            </a:r>
-            <a:r>
-              <a:rPr>
-                <a:solidFill>
-                  <a:srgbClr val="003B4F"/>
-                </a:solidFill>
-                <a:latin typeface="Courier"/>
-              </a:rPr>
-              <a:t> = </a:t>
-            </a:r>
-            <a:r>
-              <a:rPr>
-                <a:solidFill>
-                  <a:srgbClr val="20794D"/>
-                </a:solidFill>
-                <a:latin typeface="Courier"/>
-              </a:rPr>
-              <a:t>"cyan4"</a:t>
+              <a:t>"Body Mass (g)"</a:t>
+            </a:r>
+            <a:r>
+              <a:rPr>
+                <a:solidFill>
+                  <a:srgbClr val="003B4F"/>
+                </a:solidFill>
+                <a:latin typeface="Courier"/>
+              </a:rPr>
+              <a:t>,</a:t>
             </a:r>
             <a:br/>
             <a:r>
@@ -8258,116 +8407,7 @@
                 </a:solidFill>
                 <a:latin typeface="Courier"/>
               </a:rPr>
-              <a:t>  )) </a:t>
-            </a:r>
-            <a:r>
-              <a:rPr>
-                <a:solidFill>
-                  <a:srgbClr val="5E5E5E"/>
-                </a:solidFill>
-                <a:latin typeface="Courier"/>
-              </a:rPr>
-              <a:t>+</a:t>
-            </a:r>
-            <a:br/>
-            <a:r>
-              <a:rPr>
-                <a:solidFill>
-                  <a:srgbClr val="003B4F"/>
-                </a:solidFill>
-                <a:latin typeface="Courier"/>
-              </a:rPr>
-              <a:t>  </a:t>
-            </a:r>
-            <a:r>
-              <a:rPr>
-                <a:solidFill>
-                  <a:srgbClr val="4758AB"/>
-                </a:solidFill>
-                <a:latin typeface="Courier"/>
-              </a:rPr>
-              <a:t>labs</a:t>
-            </a:r>
-            <a:r>
-              <a:rPr>
-                <a:solidFill>
-                  <a:srgbClr val="003B4F"/>
-                </a:solidFill>
-                <a:latin typeface="Courier"/>
-              </a:rPr>
-              <a:t>(</a:t>
-            </a:r>
-            <a:r>
-              <a:rPr>
-                <a:solidFill>
-                  <a:srgbClr val="657422"/>
-                </a:solidFill>
-                <a:latin typeface="Courier"/>
-              </a:rPr>
-              <a:t>x =</a:t>
-            </a:r>
-            <a:r>
-              <a:rPr>
-                <a:solidFill>
-                  <a:srgbClr val="003B4F"/>
-                </a:solidFill>
-                <a:latin typeface="Courier"/>
-              </a:rPr>
-              <a:t> </a:t>
-            </a:r>
-            <a:r>
-              <a:rPr>
-                <a:solidFill>
-                  <a:srgbClr val="20794D"/>
-                </a:solidFill>
-                <a:latin typeface="Courier"/>
-              </a:rPr>
-              <a:t>"Species"</a:t>
-            </a:r>
-            <a:r>
-              <a:rPr>
-                <a:solidFill>
-                  <a:srgbClr val="003B4F"/>
-                </a:solidFill>
-                <a:latin typeface="Courier"/>
-              </a:rPr>
-              <a:t>, </a:t>
-            </a:r>
-            <a:r>
-              <a:rPr>
-                <a:solidFill>
-                  <a:srgbClr val="657422"/>
-                </a:solidFill>
-                <a:latin typeface="Courier"/>
-              </a:rPr>
-              <a:t>y =</a:t>
-            </a:r>
-            <a:r>
-              <a:rPr>
-                <a:solidFill>
-                  <a:srgbClr val="003B4F"/>
-                </a:solidFill>
-                <a:latin typeface="Courier"/>
-              </a:rPr>
-              <a:t> </a:t>
-            </a:r>
-            <a:r>
-              <a:rPr>
-                <a:solidFill>
-                  <a:srgbClr val="20794D"/>
-                </a:solidFill>
-                <a:latin typeface="Courier"/>
-              </a:rPr>
-              <a:t>"Body Mass (g)"</a:t>
-            </a:r>
-            <a:r>
-              <a:rPr>
-                <a:solidFill>
-                  <a:srgbClr val="003B4F"/>
-                </a:solidFill>
-                <a:latin typeface="Courier"/>
-              </a:rPr>
-              <a:t>, </a:t>
+              <a:t>       </a:t>
             </a:r>
             <a:r>
               <a:rPr>
@@ -9200,7 +9240,17 @@
                 </a:solidFill>
                 <a:latin typeface="Courier"/>
               </a:rPr>
-              <a:t> body_mass_g, </a:t>
+              <a:t> body_mass_g,</a:t>
+            </a:r>
+            <a:br/>
+            <a:r>
+              <a:rPr>
+                <a:solidFill>
+                  <a:srgbClr val="003B4F"/>
+                </a:solidFill>
+                <a:latin typeface="Courier"/>
+              </a:rPr>
+              <a:t>             </a:t>
             </a:r>
             <a:r>
               <a:rPr>
@@ -9400,7 +9450,17 @@
                 </a:solidFill>
                 <a:latin typeface="Courier"/>
               </a:rPr>
-              <a:t>, </a:t>
+              <a:t>,</a:t>
+            </a:r>
+            <a:br/>
+            <a:r>
+              <a:rPr>
+                <a:solidFill>
+                  <a:srgbClr val="003B4F"/>
+                </a:solidFill>
+                <a:latin typeface="Courier"/>
+              </a:rPr>
+              <a:t>       </a:t>
             </a:r>
             <a:r>
               <a:rPr>
@@ -11445,14 +11505,14 @@
               </a:rPr>
               <a:t>Rows: 342
 Columns: 8
-$ species           &lt;fct&gt; Adelie, Adelie, Adelie, Adelie, Adelie, Adelie, Adel…
-$ island            &lt;fct&gt; Torgersen, Torgersen, Torgersen, Torgersen, Torgerse…
-$ bill_length_mm    &lt;dbl&gt; 39.1, 39.5, 40.3, 36.7, 39.3, 38.9, 39.2, 34.1, 42.0…
-$ bill_depth_mm     &lt;dbl&gt; 18.7, 17.4, 18.0, 19.3, 20.6, 17.8, 19.6, 18.1, 20.2…
-$ flipper_length_mm &lt;int&gt; 181, 186, 195, 193, 190, 181, 195, 193, 190, 186, 18…
-$ body_mass_g       &lt;int&gt; 3750, 3800, 3250, 3450, 3650, 3625, 4675, 3475, 4250…
-$ sex               &lt;fct&gt; male, female, female, female, male, female, male, NA…
-$ year              &lt;int&gt; 2007, 2007, 2007, 2007, 2007, 2007, 2007, 2007, 2007…</a:t>
+$ species           &lt;fct&gt; Adelie, Adelie, Adelie, Adelie, Adeli…
+$ island            &lt;fct&gt; Torgersen, Torgersen, Torgersen, Torg…
+$ bill_length_mm    &lt;dbl&gt; 39.1, 39.5, 40.3, 36.7, 39.3, 38.9, 3…
+$ bill_depth_mm     &lt;dbl&gt; 18.7, 17.4, 18.0, 19.3, 20.6, 17.8, 1…
+$ flipper_length_mm &lt;int&gt; 181, 186, 195, 193, 190, 181, 195, 19…
+$ body_mass_g       &lt;int&gt; 3750, 3800, 3250, 3450, 3650, 3625, 4…
+$ sex               &lt;fct&gt; male, female, female, female, male, f…
+$ year              &lt;int&gt; 2007, 2007, 2007, 2007, 2007, 2007, 2…</a:t>
             </a:r>
           </a:p>
         </p:txBody>
@@ -11784,7 +11844,17 @@
                 </a:solidFill>
                 <a:latin typeface="Courier"/>
               </a:rPr>
-              <a:t> body_mass_g, </a:t>
+              <a:t> body_mass_g,</a:t>
+            </a:r>
+            <a:br/>
+            <a:r>
+              <a:rPr>
+                <a:solidFill>
+                  <a:srgbClr val="003B4F"/>
+                </a:solidFill>
+                <a:latin typeface="Courier"/>
+              </a:rPr>
+              <a:t>             </a:t>
             </a:r>
             <a:r>
               <a:rPr>
@@ -12821,7 +12891,17 @@
                 </a:solidFill>
                 <a:latin typeface="Courier"/>
               </a:rPr>
-              <a:t>, </a:t>
+              <a:t>,</a:t>
+            </a:r>
+            <a:br/>
+            <a:r>
+              <a:rPr>
+                <a:solidFill>
+                  <a:srgbClr val="003B4F"/>
+                </a:solidFill>
+                <a:latin typeface="Courier"/>
+              </a:rPr>
+              <a:t>       </a:t>
             </a:r>
             <a:r>
               <a:rPr>

--- a/docs/content/ggplot_2/ggplot_2_lecture.pptx
+++ b/docs/content/ggplot_2/ggplot_2_lecture.pptx
@@ -3366,7 +3366,7 @@
             </a:pPr>
             <a:r>
               <a:rPr/>
-              <a:t>2026-09-23</a:t>
+              <a:t>2026-09-24</a:t>
             </a:r>
           </a:p>
         </p:txBody>

--- a/docs/content/ggplot_2/ggplot_2_lecture.pptx
+++ b/docs/content/ggplot_2/ggplot_2_lecture.pptx
@@ -3366,7 +3366,7 @@
             </a:pPr>
             <a:r>
               <a:rPr/>
-              <a:t>2026-09-24</a:t>
+              <a:t>2026-09-29</a:t>
             </a:r>
           </a:p>
         </p:txBody>

--- a/docs/content/ggplot_2/ggplot_2_lecture.pptx
+++ b/docs/content/ggplot_2/ggplot_2_lecture.pptx
@@ -3366,7 +3366,7 @@
             </a:pPr>
             <a:r>
               <a:rPr/>
-              <a:t>2026-09-29</a:t>
+              <a:t>2026-10-01</a:t>
             </a:r>
           </a:p>
         </p:txBody>

--- a/docs/content/ggplot_2/ggplot_2_lecture.pptx
+++ b/docs/content/ggplot_2/ggplot_2_lecture.pptx
@@ -3366,7 +3366,7 @@
             </a:pPr>
             <a:r>
               <a:rPr/>
-              <a:t>2026-10-01</a:t>
+              <a:t>2026-10-05</a:t>
             </a:r>
           </a:p>
         </p:txBody>
@@ -4465,7 +4465,7 @@
             </a:r>
             <a:r>
               <a:rPr sz="2000"/>
-              <a:t> Gentoo penguins run heavier than the other two species — many sit above 5000 g. If we drop every penguin outside </a:t>
+              <a:t> Many Gentoos sit above 5000 g. If we drop every penguin outside </a:t>
             </a:r>
             <a:r>
               <a:rPr sz="2000">
@@ -4493,7 +4493,7 @@
             </a:r>
             <a:r>
               <a:rPr sz="2000"/>
-              <a:t> drawing the boxes, what happens to the Gentoo box specifically?</a:t>
+              <a:t> drawing the boxes, what happens to the Gentoo box?</a:t>
             </a:r>
           </a:p>
         </p:txBody>
@@ -5132,8 +5132,8 @@
         </p:blipFill>
         <p:spPr bwMode="auto">
           <a:xfrm>
-            <a:off x="127000" y="1562100"/>
-            <a:ext cx="4432300" cy="2730500"/>
+            <a:off x="127000" y="2006600"/>
+            <a:ext cx="4432300" cy="1841500"/>
           </a:xfrm>
           <a:prstGeom prst="rect">
             <a:avLst/>
@@ -5190,13 +5190,13 @@
             </a:r>
             <a:r>
               <a:rPr sz="2000"/>
-              <a:t> — and its long form </a:t>
+              <a:t> — and </a:t>
             </a:r>
             <a:r>
               <a:rPr sz="2000">
                 <a:latin typeface="Courier"/>
               </a:rPr>
-              <a:t>scale_y_continuous(limits = c(3000, 5000))</a:t>
+              <a:t>scale_y_continuous(limits = ...)</a:t>
             </a:r>
             <a:r>
               <a:rPr sz="2000"/>
@@ -5216,7 +5216,7 @@
             </a:r>
             <a:r>
               <a:rPr sz="2000"/>
-              <a:t> anything is computed. Compare the Gentoo box above to the </a:t>
+              <a:t> anything is computed. Compare the Gentoo box to the </a:t>
             </a:r>
             <a:r>
               <a:rPr sz="2000">
@@ -8730,8 +8730,8 @@
         </p:blipFill>
         <p:spPr bwMode="auto">
           <a:xfrm>
-            <a:off x="127000" y="1562100"/>
-            <a:ext cx="4432300" cy="2730500"/>
+            <a:off x="127000" y="2032000"/>
+            <a:ext cx="4432300" cy="1778000"/>
           </a:xfrm>
           <a:prstGeom prst="rect">
             <a:avLst/>
@@ -8762,7 +8762,7 @@
             <a:pPr lvl="0"/>
             <a:r>
               <a:rPr/>
-              <a:t>A sourced theme is still just a </a:t>
+              <a:t>A sourced theme is just a </a:t>
             </a:r>
             <a:r>
               <a:rPr>
@@ -8790,7 +8790,7 @@
             </a:r>
             <a:r>
               <a:rPr/>
-              <a:t> it overrides individual pieces, same as any built-in theme</a:t>
+              <a:t> it overrides single pieces</a:t>
             </a:r>
           </a:p>
           <a:p>
@@ -8803,7 +8803,7 @@
             </a:r>
             <a:r>
               <a:rPr/>
-              <a:t> still controls colors; the theme controls everything else (fonts, lines, margins)</a:t>
+              <a:t> still controls colors; the theme controls fonts, lines, margins</a:t>
             </a:r>
           </a:p>
           <a:p>
@@ -8821,16 +8821,11 @@
             </a:pPr>
             <a:r>
               <a:rPr sz="2000" b="1"/>
-              <a:t>✅ Key idea</a:t>
-            </a:r>
-          </a:p>
-          <a:p>
-            <a:pPr lvl="0" indent="0" marL="1270000">
-              <a:buNone/>
-            </a:pPr>
+              <a:t>✅ Key idea:</a:t>
+            </a:r>
             <a:r>
               <a:rPr sz="2000"/>
-              <a:t>One theme file, sourced at the top of every script, keeps every figure in a project looking consistent — change the file once, every plot updates.</a:t>
+              <a:t> one theme file sourced at the top of every script keeps a project consistent — change it once, every plot updates.</a:t>
             </a:r>
           </a:p>
         </p:txBody>
@@ -10161,8 +10156,8 @@
         </p:blipFill>
         <p:spPr bwMode="auto">
           <a:xfrm>
-            <a:off x="127000" y="1562100"/>
-            <a:ext cx="4432300" cy="2730500"/>
+            <a:off x="127000" y="2108200"/>
+            <a:ext cx="4432300" cy="1638300"/>
           </a:xfrm>
           <a:prstGeom prst="rect">
             <a:avLst/>
@@ -10201,7 +10196,7 @@
             </a:r>
             <a:r>
               <a:rPr/>
-              <a:t> — build them separately first, exactly like you already do</a:t>
+              <a:t> — build them separately first</a:t>
             </a:r>
           </a:p>
           <a:p>
@@ -10214,17 +10209,7 @@
             </a:r>
             <a:r>
               <a:rPr/>
-              <a:t> places two </a:t>
-            </a:r>
-            <a:r>
-              <a:rPr>
-                <a:latin typeface="Courier"/>
-              </a:rPr>
-              <a:t>patchwork</a:t>
-            </a:r>
-            <a:r>
-              <a:rPr/>
-              <a:t>-ready plots </a:t>
+              <a:t> places two plots </a:t>
             </a:r>
             <a:r>
               <a:rPr b="1"/>
@@ -10259,11 +10244,7 @@
             </a:r>
             <a:r>
               <a:rPr b="1"/>
-              <a:t>whole combined figure</a:t>
-            </a:r>
-            <a:r>
-              <a:rPr/>
-              <a:t>, not any single panel</a:t>
+              <a:t>whole figure</a:t>
             </a:r>
           </a:p>
         </p:txBody>
@@ -11691,7 +11672,7 @@
             </a:r>
             <a:r>
               <a:rPr sz="2000"/>
-              <a:t> flipper length and body mass should move together — longer flippers, heavier birds. Will three species separate into three clouds, or overlap into one?</a:t>
+              <a:t> longer flippers, heavier birds. Will the three species separate into three clouds, or overlap into one?</a:t>
             </a:r>
           </a:p>
         </p:txBody>
@@ -12020,6 +12001,42 @@
               </a:rPr>
               <a:t>(</a:t>
             </a:r>
+            <a:r>
+              <a:rPr>
+                <a:solidFill>
+                  <a:srgbClr val="657422"/>
+                </a:solidFill>
+                <a:latin typeface="Courier"/>
+              </a:rPr>
+              <a:t>title =</a:t>
+            </a:r>
+            <a:r>
+              <a:rPr>
+                <a:solidFill>
+                  <a:srgbClr val="003B4F"/>
+                </a:solidFill>
+                <a:latin typeface="Courier"/>
+              </a:rPr>
+              <a:t> </a:t>
+            </a:r>
+            <a:r>
+              <a:rPr>
+                <a:solidFill>
+                  <a:srgbClr val="20794D"/>
+                </a:solidFill>
+                <a:latin typeface="Courier"/>
+              </a:rPr>
+              <a:t>"Body Mass vs. Flipper Length"</a:t>
+            </a:r>
+            <a:r>
+              <a:rPr>
+                <a:solidFill>
+                  <a:srgbClr val="003B4F"/>
+                </a:solidFill>
+                <a:latin typeface="Courier"/>
+              </a:rPr>
+              <a:t>,</a:t>
+            </a:r>
             <a:br/>
             <a:r>
               <a:rPr>
@@ -12028,7 +12045,7 @@
                 </a:solidFill>
                 <a:latin typeface="Courier"/>
               </a:rPr>
-              <a:t>    </a:t>
+              <a:t>       </a:t>
             </a:r>
             <a:r>
               <a:rPr>
@@ -12037,7 +12054,7 @@
                 </a:solidFill>
                 <a:latin typeface="Courier"/>
               </a:rPr>
-              <a:t>title =</a:t>
+              <a:t>x =</a:t>
             </a:r>
             <a:r>
               <a:rPr>
@@ -12055,7 +12072,43 @@
                 </a:solidFill>
                 <a:latin typeface="Courier"/>
               </a:rPr>
-              <a:t>"Body Mass vs. Flipper Length"</a:t>
+              <a:t>"Flipper Length (mm)"</a:t>
+            </a:r>
+            <a:r>
+              <a:rPr>
+                <a:solidFill>
+                  <a:srgbClr val="003B4F"/>
+                </a:solidFill>
+                <a:latin typeface="Courier"/>
+              </a:rPr>
+              <a:t>, </a:t>
+            </a:r>
+            <a:r>
+              <a:rPr>
+                <a:solidFill>
+                  <a:srgbClr val="657422"/>
+                </a:solidFill>
+                <a:latin typeface="Courier"/>
+              </a:rPr>
+              <a:t>y =</a:t>
+            </a:r>
+            <a:r>
+              <a:rPr>
+                <a:solidFill>
+                  <a:srgbClr val="003B4F"/>
+                </a:solidFill>
+                <a:latin typeface="Courier"/>
+              </a:rPr>
+              <a:t> </a:t>
+            </a:r>
+            <a:r>
+              <a:rPr>
+                <a:solidFill>
+                  <a:srgbClr val="20794D"/>
+                </a:solidFill>
+                <a:latin typeface="Courier"/>
+              </a:rPr>
+              <a:t>"Body Mass (g)"</a:t>
             </a:r>
             <a:r>
               <a:rPr>
@@ -12074,7 +12127,7 @@
                 </a:solidFill>
                 <a:latin typeface="Courier"/>
               </a:rPr>
-              <a:t>    </a:t>
+              <a:t>       </a:t>
             </a:r>
             <a:r>
               <a:rPr>
@@ -12083,7 +12136,7 @@
                 </a:solidFill>
                 <a:latin typeface="Courier"/>
               </a:rPr>
-              <a:t>x =</a:t>
+              <a:t>color =</a:t>
             </a:r>
             <a:r>
               <a:rPr>
@@ -12101,109 +12154,16 @@
                 </a:solidFill>
                 <a:latin typeface="Courier"/>
               </a:rPr>
-              <a:t>"Flipper Length (mm)"</a:t>
-            </a:r>
-            <a:r>
-              <a:rPr>
-                <a:solidFill>
-                  <a:srgbClr val="003B4F"/>
-                </a:solidFill>
-                <a:latin typeface="Courier"/>
-              </a:rPr>
-              <a:t>,</a:t>
-            </a:r>
-            <a:br/>
-            <a:r>
-              <a:rPr>
-                <a:solidFill>
-                  <a:srgbClr val="003B4F"/>
-                </a:solidFill>
-                <a:latin typeface="Courier"/>
-              </a:rPr>
-              <a:t>    </a:t>
-            </a:r>
-            <a:r>
-              <a:rPr>
-                <a:solidFill>
-                  <a:srgbClr val="657422"/>
-                </a:solidFill>
-                <a:latin typeface="Courier"/>
-              </a:rPr>
-              <a:t>y =</a:t>
-            </a:r>
-            <a:r>
-              <a:rPr>
-                <a:solidFill>
-                  <a:srgbClr val="003B4F"/>
-                </a:solidFill>
-                <a:latin typeface="Courier"/>
-              </a:rPr>
-              <a:t> </a:t>
-            </a:r>
-            <a:r>
-              <a:rPr>
-                <a:solidFill>
-                  <a:srgbClr val="20794D"/>
-                </a:solidFill>
-                <a:latin typeface="Courier"/>
-              </a:rPr>
-              <a:t>"Body Mass (g)"</a:t>
-            </a:r>
-            <a:r>
-              <a:rPr>
-                <a:solidFill>
-                  <a:srgbClr val="003B4F"/>
-                </a:solidFill>
-                <a:latin typeface="Courier"/>
-              </a:rPr>
-              <a:t>,</a:t>
-            </a:r>
-            <a:br/>
-            <a:r>
-              <a:rPr>
-                <a:solidFill>
-                  <a:srgbClr val="003B4F"/>
-                </a:solidFill>
-                <a:latin typeface="Courier"/>
-              </a:rPr>
-              <a:t>    </a:t>
-            </a:r>
-            <a:r>
-              <a:rPr>
-                <a:solidFill>
-                  <a:srgbClr val="657422"/>
-                </a:solidFill>
-                <a:latin typeface="Courier"/>
-              </a:rPr>
-              <a:t>color =</a:t>
-            </a:r>
-            <a:r>
-              <a:rPr>
-                <a:solidFill>
-                  <a:srgbClr val="003B4F"/>
-                </a:solidFill>
-                <a:latin typeface="Courier"/>
-              </a:rPr>
-              <a:t> </a:t>
-            </a:r>
-            <a:r>
-              <a:rPr>
-                <a:solidFill>
-                  <a:srgbClr val="20794D"/>
-                </a:solidFill>
-                <a:latin typeface="Courier"/>
-              </a:rPr>
               <a:t>"Species"</a:t>
             </a:r>
-            <a:br/>
-            <a:r>
-              <a:rPr>
-                <a:solidFill>
-                  <a:srgbClr val="003B4F"/>
-                </a:solidFill>
-                <a:latin typeface="Courier"/>
-              </a:rPr>
-              <a:t>  ) </a:t>
+            <a:r>
+              <a:rPr>
+                <a:solidFill>
+                  <a:srgbClr val="003B4F"/>
+                </a:solidFill>
+                <a:latin typeface="Courier"/>
+              </a:rPr>
+              <a:t>) </a:t>
             </a:r>
             <a:r>
               <a:rPr>
@@ -12261,8 +12221,8 @@
         </p:blipFill>
         <p:spPr bwMode="auto">
           <a:xfrm>
-            <a:off x="127000" y="1562100"/>
-            <a:ext cx="4432300" cy="2730500"/>
+            <a:off x="127000" y="2032000"/>
+            <a:ext cx="4432300" cy="1778000"/>
           </a:xfrm>
           <a:prstGeom prst="rect">
             <a:avLst/>

--- a/docs/content/ggplot_2/ggplot_2_lecture.pptx
+++ b/docs/content/ggplot_2/ggplot_2_lecture.pptx
@@ -3366,7 +3366,7 @@
             </a:pPr>
             <a:r>
               <a:rPr/>
-              <a:t>2026-10-05</a:t>
+              <a:t>2026-10-08</a:t>
             </a:r>
           </a:p>
         </p:txBody>

--- a/docs/content/ggplot_2/ggplot_2_lecture.pptx
+++ b/docs/content/ggplot_2/ggplot_2_lecture.pptx
@@ -3366,7 +3366,7 @@
             </a:pPr>
             <a:r>
               <a:rPr/>
-              <a:t>2026-10-08</a:t>
+              <a:t>2026-10-09</a:t>
             </a:r>
           </a:p>
         </p:txBody>

--- a/docs/content/ggplot_2/ggplot_2_lecture.pptx
+++ b/docs/content/ggplot_2/ggplot_2_lecture.pptx
@@ -3366,7 +3366,7 @@
             </a:pPr>
             <a:r>
               <a:rPr/>
-              <a:t>2026-10-09</a:t>
+              <a:t>2026-10-19</a:t>
             </a:r>
           </a:p>
         </p:txBody>

--- a/docs/content/ggplot_2/ggplot_2_lecture.pptx
+++ b/docs/content/ggplot_2/ggplot_2_lecture.pptx
@@ -3366,7 +3366,7 @@
             </a:pPr>
             <a:r>
               <a:rPr/>
-              <a:t>2026-10-19</a:t>
+              <a:t>2026-10-22</a:t>
             </a:r>
           </a:p>
         </p:txBody>
